--- a/slides/2.Pseudocode/Pseudocode.pptx
+++ b/slides/2.Pseudocode/Pseudocode.pptx
@@ -5,7 +5,7 @@
     <p:sldMasterId id="2147483672" r:id="rId1"/>
   </p:sldMasterIdLst>
   <p:notesMasterIdLst>
-    <p:notesMasterId r:id="rId11"/>
+    <p:notesMasterId r:id="rId12"/>
   </p:notesMasterIdLst>
   <p:sldIdLst>
     <p:sldId id="256" r:id="rId2"/>
@@ -17,28 +17,29 @@
     <p:sldId id="319" r:id="rId8"/>
     <p:sldId id="321" r:id="rId9"/>
     <p:sldId id="320" r:id="rId10"/>
+    <p:sldId id="322" r:id="rId11"/>
   </p:sldIdLst>
   <p:sldSz cx="9144000" cy="5143500" type="screen16x9"/>
   <p:notesSz cx="6858000" cy="9144000"/>
   <p:embeddedFontLst>
     <p:embeddedFont>
       <p:font typeface="Consolas" panose="020B0609020204030204" pitchFamily="49" charset="0"/>
-      <p:regular r:id="rId12"/>
-      <p:bold r:id="rId13"/>
-      <p:italic r:id="rId14"/>
-      <p:boldItalic r:id="rId15"/>
+      <p:regular r:id="rId13"/>
+      <p:bold r:id="rId14"/>
+      <p:italic r:id="rId15"/>
+      <p:boldItalic r:id="rId16"/>
     </p:embeddedFont>
     <p:embeddedFont>
       <p:font typeface="Dana" panose="020B0604020202020204" charset="0"/>
-      <p:regular r:id="rId16"/>
-      <p:bold r:id="rId17"/>
-      <p:italic r:id="rId18"/>
-      <p:boldItalic r:id="rId19"/>
+      <p:regular r:id="rId17"/>
+      <p:bold r:id="rId18"/>
+      <p:italic r:id="rId19"/>
+      <p:boldItalic r:id="rId20"/>
     </p:embeddedFont>
     <p:embeddedFont>
       <p:font typeface="Fira Code" panose="020B0809050000020004" pitchFamily="49" charset="0"/>
-      <p:regular r:id="rId20"/>
-      <p:bold r:id="rId21"/>
+      <p:regular r:id="rId21"/>
+      <p:bold r:id="rId22"/>
     </p:embeddedFont>
   </p:embeddedFontLst>
   <p:defaultTextStyle>
@@ -5794,6 +5795,678 @@
 </p:sld>
 </file>
 
+<file path=ppt/slides/slide10.xml><?xml version="1.0" encoding="utf-8"?>
+<p:sld xmlns:a="http://schemas.openxmlformats.org/drawingml/2006/main" xmlns:r="http://schemas.openxmlformats.org/officeDocument/2006/relationships" xmlns:p="http://schemas.openxmlformats.org/presentationml/2006/main">
+  <p:cSld>
+    <p:spTree>
+      <p:nvGrpSpPr>
+        <p:cNvPr id="1" name="">
+          <a:extLst>
+            <a:ext uri="{FF2B5EF4-FFF2-40B4-BE49-F238E27FC236}">
+              <a16:creationId xmlns:a16="http://schemas.microsoft.com/office/drawing/2014/main" id="{9932B6AC-899F-84D4-CDAB-19EECDBC93D2}"/>
+            </a:ext>
+          </a:extLst>
+        </p:cNvPr>
+        <p:cNvGrpSpPr/>
+        <p:nvPr/>
+      </p:nvGrpSpPr>
+      <p:grpSpPr>
+        <a:xfrm>
+          <a:off x="0" y="0"/>
+          <a:ext cx="0" cy="0"/>
+          <a:chOff x="0" y="0"/>
+          <a:chExt cx="0" cy="0"/>
+        </a:xfrm>
+      </p:grpSpPr>
+      <p:sp>
+        <p:nvSpPr>
+          <p:cNvPr id="6" name="TextBox 5">
+            <a:extLst>
+              <a:ext uri="{FF2B5EF4-FFF2-40B4-BE49-F238E27FC236}">
+                <a16:creationId xmlns:a16="http://schemas.microsoft.com/office/drawing/2014/main" id="{F4BD1ED0-6177-BBE9-A4C4-389ACF88351A}"/>
+              </a:ext>
+            </a:extLst>
+          </p:cNvPr>
+          <p:cNvSpPr txBox="1"/>
+          <p:nvPr/>
+        </p:nvSpPr>
+        <p:spPr>
+          <a:xfrm>
+            <a:off x="957649" y="374362"/>
+            <a:ext cx="4572000" cy="461665"/>
+          </a:xfrm>
+          <a:prstGeom prst="rect">
+            <a:avLst/>
+          </a:prstGeom>
+          <a:noFill/>
+        </p:spPr>
+        <p:txBody>
+          <a:bodyPr wrap="square">
+            <a:spAutoFit/>
+          </a:bodyPr>
+          <a:lstStyle/>
+          <a:p>
+            <a:r>
+              <a:rPr lang="en-US" sz="2400" dirty="0">
+                <a:solidFill>
+                  <a:schemeClr val="accent2"/>
+                </a:solidFill>
+                <a:latin typeface="Fira Code"/>
+                <a:ea typeface="Fira Code"/>
+                <a:cs typeface="Fira Code"/>
+                <a:sym typeface="Fira Code"/>
+              </a:rPr>
+              <a:t>Home Work</a:t>
+            </a:r>
+          </a:p>
+        </p:txBody>
+      </p:sp>
+      <p:sp>
+        <p:nvSpPr>
+          <p:cNvPr id="3" name="Google Shape;473;p28">
+            <a:extLst>
+              <a:ext uri="{FF2B5EF4-FFF2-40B4-BE49-F238E27FC236}">
+                <a16:creationId xmlns:a16="http://schemas.microsoft.com/office/drawing/2014/main" id="{2A6193F6-5F1E-733A-6151-68FED5FA78AC}"/>
+              </a:ext>
+            </a:extLst>
+          </p:cNvPr>
+          <p:cNvSpPr txBox="1">
+            <a:spLocks/>
+          </p:cNvSpPr>
+          <p:nvPr/>
+        </p:nvSpPr>
+        <p:spPr>
+          <a:xfrm>
+            <a:off x="732739" y="4666848"/>
+            <a:ext cx="4865100" cy="357300"/>
+          </a:xfrm>
+          <a:prstGeom prst="rect">
+            <a:avLst/>
+          </a:prstGeom>
+          <a:noFill/>
+          <a:ln>
+            <a:noFill/>
+          </a:ln>
+        </p:spPr>
+        <p:txBody>
+          <a:bodyPr spcFirstLastPara="1" wrap="square" lIns="91425" tIns="91425" rIns="91425" bIns="91425" anchor="ctr" anchorCtr="0">
+            <a:noAutofit/>
+          </a:bodyPr>
+          <a:lstStyle>
+            <a:defPPr marR="0" lvl="0" algn="l" rtl="0">
+              <a:lnSpc>
+                <a:spcPct val="100000"/>
+              </a:lnSpc>
+              <a:spcBef>
+                <a:spcPts val="0"/>
+              </a:spcBef>
+              <a:spcAft>
+                <a:spcPts val="0"/>
+              </a:spcAft>
+            </a:defPPr>
+            <a:lvl1pPr marL="457200" marR="0" lvl="0" indent="-317500" algn="l" rtl="0">
+              <a:lnSpc>
+                <a:spcPct val="100000"/>
+              </a:lnSpc>
+              <a:spcBef>
+                <a:spcPts val="0"/>
+              </a:spcBef>
+              <a:spcAft>
+                <a:spcPts val="0"/>
+              </a:spcAft>
+              <a:buClr>
+                <a:schemeClr val="dk2"/>
+              </a:buClr>
+              <a:buSzPts val="1400"/>
+              <a:buFont typeface="Fira Code"/>
+              <a:buChar char="●"/>
+              <a:defRPr sz="1400" b="0" i="0" u="none" strike="noStrike" cap="none">
+                <a:solidFill>
+                  <a:schemeClr val="dk2"/>
+                </a:solidFill>
+                <a:latin typeface="Fira Code"/>
+                <a:ea typeface="Fira Code"/>
+                <a:cs typeface="Fira Code"/>
+                <a:sym typeface="Fira Code"/>
+              </a:defRPr>
+            </a:lvl1pPr>
+            <a:lvl2pPr marL="914400" marR="0" lvl="1" indent="-317500" algn="l" rtl="0">
+              <a:lnSpc>
+                <a:spcPct val="100000"/>
+              </a:lnSpc>
+              <a:spcBef>
+                <a:spcPts val="0"/>
+              </a:spcBef>
+              <a:spcAft>
+                <a:spcPts val="0"/>
+              </a:spcAft>
+              <a:buClr>
+                <a:schemeClr val="dk2"/>
+              </a:buClr>
+              <a:buSzPts val="1400"/>
+              <a:buFont typeface="Fira Code"/>
+              <a:buChar char="○"/>
+              <a:defRPr sz="1400" b="0" i="0" u="none" strike="noStrike" cap="none">
+                <a:solidFill>
+                  <a:schemeClr val="dk2"/>
+                </a:solidFill>
+                <a:latin typeface="Fira Code"/>
+                <a:ea typeface="Fira Code"/>
+                <a:cs typeface="Fira Code"/>
+                <a:sym typeface="Fira Code"/>
+              </a:defRPr>
+            </a:lvl2pPr>
+            <a:lvl3pPr marL="1371600" marR="0" lvl="2" indent="-317500" algn="l" rtl="0">
+              <a:lnSpc>
+                <a:spcPct val="100000"/>
+              </a:lnSpc>
+              <a:spcBef>
+                <a:spcPts val="0"/>
+              </a:spcBef>
+              <a:spcAft>
+                <a:spcPts val="0"/>
+              </a:spcAft>
+              <a:buClr>
+                <a:schemeClr val="dk2"/>
+              </a:buClr>
+              <a:buSzPts val="1400"/>
+              <a:buFont typeface="Fira Code"/>
+              <a:buChar char="■"/>
+              <a:defRPr sz="1400" b="0" i="0" u="none" strike="noStrike" cap="none">
+                <a:solidFill>
+                  <a:schemeClr val="dk2"/>
+                </a:solidFill>
+                <a:latin typeface="Fira Code"/>
+                <a:ea typeface="Fira Code"/>
+                <a:cs typeface="Fira Code"/>
+                <a:sym typeface="Fira Code"/>
+              </a:defRPr>
+            </a:lvl3pPr>
+            <a:lvl4pPr marL="1828800" marR="0" lvl="3" indent="-317500" algn="l" rtl="0">
+              <a:lnSpc>
+                <a:spcPct val="100000"/>
+              </a:lnSpc>
+              <a:spcBef>
+                <a:spcPts val="0"/>
+              </a:spcBef>
+              <a:spcAft>
+                <a:spcPts val="0"/>
+              </a:spcAft>
+              <a:buClr>
+                <a:schemeClr val="dk2"/>
+              </a:buClr>
+              <a:buSzPts val="1400"/>
+              <a:buFont typeface="Fira Code"/>
+              <a:buChar char="●"/>
+              <a:defRPr sz="1400" b="0" i="0" u="none" strike="noStrike" cap="none">
+                <a:solidFill>
+                  <a:schemeClr val="dk2"/>
+                </a:solidFill>
+                <a:latin typeface="Fira Code"/>
+                <a:ea typeface="Fira Code"/>
+                <a:cs typeface="Fira Code"/>
+                <a:sym typeface="Fira Code"/>
+              </a:defRPr>
+            </a:lvl4pPr>
+            <a:lvl5pPr marL="2286000" marR="0" lvl="4" indent="-317500" algn="l" rtl="0">
+              <a:lnSpc>
+                <a:spcPct val="100000"/>
+              </a:lnSpc>
+              <a:spcBef>
+                <a:spcPts val="0"/>
+              </a:spcBef>
+              <a:spcAft>
+                <a:spcPts val="0"/>
+              </a:spcAft>
+              <a:buClr>
+                <a:schemeClr val="dk2"/>
+              </a:buClr>
+              <a:buSzPts val="1400"/>
+              <a:buFont typeface="Fira Code"/>
+              <a:buChar char="○"/>
+              <a:defRPr sz="1400" b="0" i="0" u="none" strike="noStrike" cap="none">
+                <a:solidFill>
+                  <a:schemeClr val="dk2"/>
+                </a:solidFill>
+                <a:latin typeface="Fira Code"/>
+                <a:ea typeface="Fira Code"/>
+                <a:cs typeface="Fira Code"/>
+                <a:sym typeface="Fira Code"/>
+              </a:defRPr>
+            </a:lvl5pPr>
+            <a:lvl6pPr marL="2743200" marR="0" lvl="5" indent="-317500" algn="l" rtl="0">
+              <a:lnSpc>
+                <a:spcPct val="100000"/>
+              </a:lnSpc>
+              <a:spcBef>
+                <a:spcPts val="0"/>
+              </a:spcBef>
+              <a:spcAft>
+                <a:spcPts val="0"/>
+              </a:spcAft>
+              <a:buClr>
+                <a:schemeClr val="dk2"/>
+              </a:buClr>
+              <a:buSzPts val="1400"/>
+              <a:buFont typeface="Fira Code"/>
+              <a:buChar char="■"/>
+              <a:defRPr sz="1400" b="0" i="0" u="none" strike="noStrike" cap="none">
+                <a:solidFill>
+                  <a:schemeClr val="dk2"/>
+                </a:solidFill>
+                <a:latin typeface="Fira Code"/>
+                <a:ea typeface="Fira Code"/>
+                <a:cs typeface="Fira Code"/>
+                <a:sym typeface="Fira Code"/>
+              </a:defRPr>
+            </a:lvl6pPr>
+            <a:lvl7pPr marL="3200400" marR="0" lvl="6" indent="-317500" algn="l" rtl="0">
+              <a:lnSpc>
+                <a:spcPct val="100000"/>
+              </a:lnSpc>
+              <a:spcBef>
+                <a:spcPts val="0"/>
+              </a:spcBef>
+              <a:spcAft>
+                <a:spcPts val="0"/>
+              </a:spcAft>
+              <a:buClr>
+                <a:schemeClr val="dk2"/>
+              </a:buClr>
+              <a:buSzPts val="1400"/>
+              <a:buFont typeface="Fira Code"/>
+              <a:buChar char="●"/>
+              <a:defRPr sz="1400" b="0" i="0" u="none" strike="noStrike" cap="none">
+                <a:solidFill>
+                  <a:schemeClr val="dk2"/>
+                </a:solidFill>
+                <a:latin typeface="Fira Code"/>
+                <a:ea typeface="Fira Code"/>
+                <a:cs typeface="Fira Code"/>
+                <a:sym typeface="Fira Code"/>
+              </a:defRPr>
+            </a:lvl7pPr>
+            <a:lvl8pPr marL="3657600" marR="0" lvl="7" indent="-317500" algn="l" rtl="0">
+              <a:lnSpc>
+                <a:spcPct val="100000"/>
+              </a:lnSpc>
+              <a:spcBef>
+                <a:spcPts val="0"/>
+              </a:spcBef>
+              <a:spcAft>
+                <a:spcPts val="0"/>
+              </a:spcAft>
+              <a:buClr>
+                <a:schemeClr val="dk2"/>
+              </a:buClr>
+              <a:buSzPts val="1400"/>
+              <a:buFont typeface="Fira Code"/>
+              <a:buChar char="○"/>
+              <a:defRPr sz="1400" b="0" i="0" u="none" strike="noStrike" cap="none">
+                <a:solidFill>
+                  <a:schemeClr val="dk2"/>
+                </a:solidFill>
+                <a:latin typeface="Fira Code"/>
+                <a:ea typeface="Fira Code"/>
+                <a:cs typeface="Fira Code"/>
+                <a:sym typeface="Fira Code"/>
+              </a:defRPr>
+            </a:lvl8pPr>
+            <a:lvl9pPr marL="4114800" marR="0" lvl="8" indent="-317500" algn="l" rtl="0">
+              <a:lnSpc>
+                <a:spcPct val="100000"/>
+              </a:lnSpc>
+              <a:spcBef>
+                <a:spcPts val="0"/>
+              </a:spcBef>
+              <a:spcAft>
+                <a:spcPts val="0"/>
+              </a:spcAft>
+              <a:buClr>
+                <a:schemeClr val="dk2"/>
+              </a:buClr>
+              <a:buSzPts val="1400"/>
+              <a:buFont typeface="Fira Code"/>
+              <a:buChar char="■"/>
+              <a:defRPr sz="1400" b="0" i="0" u="none" strike="noStrike" cap="none">
+                <a:solidFill>
+                  <a:schemeClr val="dk2"/>
+                </a:solidFill>
+                <a:latin typeface="Fira Code"/>
+                <a:ea typeface="Fira Code"/>
+                <a:cs typeface="Fira Code"/>
+                <a:sym typeface="Fira Code"/>
+              </a:defRPr>
+            </a:lvl9pPr>
+          </a:lstStyle>
+          <a:p>
+            <a:pPr marL="0" indent="0">
+              <a:buFont typeface="Fira Code"/>
+              <a:buNone/>
+            </a:pPr>
+            <a:r>
+              <a:rPr lang="en-US" dirty="0">
+                <a:solidFill>
+                  <a:schemeClr val="accent3"/>
+                </a:solidFill>
+              </a:rPr>
+              <a:t>Programming Language Lab</a:t>
+            </a:r>
+          </a:p>
+        </p:txBody>
+      </p:sp>
+      <p:sp>
+        <p:nvSpPr>
+          <p:cNvPr id="5" name="Google Shape;473;p28">
+            <a:extLst>
+              <a:ext uri="{FF2B5EF4-FFF2-40B4-BE49-F238E27FC236}">
+                <a16:creationId xmlns:a16="http://schemas.microsoft.com/office/drawing/2014/main" id="{50A32439-1046-EF4F-20AC-0423B3AEB1A7}"/>
+              </a:ext>
+            </a:extLst>
+          </p:cNvPr>
+          <p:cNvSpPr txBox="1">
+            <a:spLocks/>
+          </p:cNvSpPr>
+          <p:nvPr/>
+        </p:nvSpPr>
+        <p:spPr>
+          <a:xfrm>
+            <a:off x="8433851" y="4694675"/>
+            <a:ext cx="319124" cy="357300"/>
+          </a:xfrm>
+          <a:prstGeom prst="rect">
+            <a:avLst/>
+          </a:prstGeom>
+          <a:noFill/>
+          <a:ln>
+            <a:noFill/>
+          </a:ln>
+        </p:spPr>
+        <p:txBody>
+          <a:bodyPr spcFirstLastPara="1" wrap="square" lIns="91425" tIns="91425" rIns="91425" bIns="91425" anchor="ctr" anchorCtr="0">
+            <a:noAutofit/>
+          </a:bodyPr>
+          <a:lstStyle>
+            <a:defPPr marR="0" lvl="0" algn="l" rtl="0">
+              <a:lnSpc>
+                <a:spcPct val="100000"/>
+              </a:lnSpc>
+              <a:spcBef>
+                <a:spcPts val="0"/>
+              </a:spcBef>
+              <a:spcAft>
+                <a:spcPts val="0"/>
+              </a:spcAft>
+            </a:defPPr>
+            <a:lvl1pPr marL="457200" marR="0" lvl="0" indent="-317500" algn="l" rtl="0">
+              <a:lnSpc>
+                <a:spcPct val="100000"/>
+              </a:lnSpc>
+              <a:spcBef>
+                <a:spcPts val="0"/>
+              </a:spcBef>
+              <a:spcAft>
+                <a:spcPts val="0"/>
+              </a:spcAft>
+              <a:buClr>
+                <a:schemeClr val="dk2"/>
+              </a:buClr>
+              <a:buSzPts val="1400"/>
+              <a:buFont typeface="Fira Code"/>
+              <a:buChar char="●"/>
+              <a:defRPr sz="1400" b="0" i="0" u="none" strike="noStrike" cap="none">
+                <a:solidFill>
+                  <a:schemeClr val="dk2"/>
+                </a:solidFill>
+                <a:latin typeface="Fira Code"/>
+                <a:ea typeface="Fira Code"/>
+                <a:cs typeface="Fira Code"/>
+                <a:sym typeface="Fira Code"/>
+              </a:defRPr>
+            </a:lvl1pPr>
+            <a:lvl2pPr marL="914400" marR="0" lvl="1" indent="-317500" algn="l" rtl="0">
+              <a:lnSpc>
+                <a:spcPct val="100000"/>
+              </a:lnSpc>
+              <a:spcBef>
+                <a:spcPts val="0"/>
+              </a:spcBef>
+              <a:spcAft>
+                <a:spcPts val="0"/>
+              </a:spcAft>
+              <a:buClr>
+                <a:schemeClr val="dk2"/>
+              </a:buClr>
+              <a:buSzPts val="1400"/>
+              <a:buFont typeface="Fira Code"/>
+              <a:buChar char="○"/>
+              <a:defRPr sz="1400" b="0" i="0" u="none" strike="noStrike" cap="none">
+                <a:solidFill>
+                  <a:schemeClr val="dk2"/>
+                </a:solidFill>
+                <a:latin typeface="Fira Code"/>
+                <a:ea typeface="Fira Code"/>
+                <a:cs typeface="Fira Code"/>
+                <a:sym typeface="Fira Code"/>
+              </a:defRPr>
+            </a:lvl2pPr>
+            <a:lvl3pPr marL="1371600" marR="0" lvl="2" indent="-317500" algn="l" rtl="0">
+              <a:lnSpc>
+                <a:spcPct val="100000"/>
+              </a:lnSpc>
+              <a:spcBef>
+                <a:spcPts val="0"/>
+              </a:spcBef>
+              <a:spcAft>
+                <a:spcPts val="0"/>
+              </a:spcAft>
+              <a:buClr>
+                <a:schemeClr val="dk2"/>
+              </a:buClr>
+              <a:buSzPts val="1400"/>
+              <a:buFont typeface="Fira Code"/>
+              <a:buChar char="■"/>
+              <a:defRPr sz="1400" b="0" i="0" u="none" strike="noStrike" cap="none">
+                <a:solidFill>
+                  <a:schemeClr val="dk2"/>
+                </a:solidFill>
+                <a:latin typeface="Fira Code"/>
+                <a:ea typeface="Fira Code"/>
+                <a:cs typeface="Fira Code"/>
+                <a:sym typeface="Fira Code"/>
+              </a:defRPr>
+            </a:lvl3pPr>
+            <a:lvl4pPr marL="1828800" marR="0" lvl="3" indent="-317500" algn="l" rtl="0">
+              <a:lnSpc>
+                <a:spcPct val="100000"/>
+              </a:lnSpc>
+              <a:spcBef>
+                <a:spcPts val="0"/>
+              </a:spcBef>
+              <a:spcAft>
+                <a:spcPts val="0"/>
+              </a:spcAft>
+              <a:buClr>
+                <a:schemeClr val="dk2"/>
+              </a:buClr>
+              <a:buSzPts val="1400"/>
+              <a:buFont typeface="Fira Code"/>
+              <a:buChar char="●"/>
+              <a:defRPr sz="1400" b="0" i="0" u="none" strike="noStrike" cap="none">
+                <a:solidFill>
+                  <a:schemeClr val="dk2"/>
+                </a:solidFill>
+                <a:latin typeface="Fira Code"/>
+                <a:ea typeface="Fira Code"/>
+                <a:cs typeface="Fira Code"/>
+                <a:sym typeface="Fira Code"/>
+              </a:defRPr>
+            </a:lvl4pPr>
+            <a:lvl5pPr marL="2286000" marR="0" lvl="4" indent="-317500" algn="l" rtl="0">
+              <a:lnSpc>
+                <a:spcPct val="100000"/>
+              </a:lnSpc>
+              <a:spcBef>
+                <a:spcPts val="0"/>
+              </a:spcBef>
+              <a:spcAft>
+                <a:spcPts val="0"/>
+              </a:spcAft>
+              <a:buClr>
+                <a:schemeClr val="dk2"/>
+              </a:buClr>
+              <a:buSzPts val="1400"/>
+              <a:buFont typeface="Fira Code"/>
+              <a:buChar char="○"/>
+              <a:defRPr sz="1400" b="0" i="0" u="none" strike="noStrike" cap="none">
+                <a:solidFill>
+                  <a:schemeClr val="dk2"/>
+                </a:solidFill>
+                <a:latin typeface="Fira Code"/>
+                <a:ea typeface="Fira Code"/>
+                <a:cs typeface="Fira Code"/>
+                <a:sym typeface="Fira Code"/>
+              </a:defRPr>
+            </a:lvl5pPr>
+            <a:lvl6pPr marL="2743200" marR="0" lvl="5" indent="-317500" algn="l" rtl="0">
+              <a:lnSpc>
+                <a:spcPct val="100000"/>
+              </a:lnSpc>
+              <a:spcBef>
+                <a:spcPts val="0"/>
+              </a:spcBef>
+              <a:spcAft>
+                <a:spcPts val="0"/>
+              </a:spcAft>
+              <a:buClr>
+                <a:schemeClr val="dk2"/>
+              </a:buClr>
+              <a:buSzPts val="1400"/>
+              <a:buFont typeface="Fira Code"/>
+              <a:buChar char="■"/>
+              <a:defRPr sz="1400" b="0" i="0" u="none" strike="noStrike" cap="none">
+                <a:solidFill>
+                  <a:schemeClr val="dk2"/>
+                </a:solidFill>
+                <a:latin typeface="Fira Code"/>
+                <a:ea typeface="Fira Code"/>
+                <a:cs typeface="Fira Code"/>
+                <a:sym typeface="Fira Code"/>
+              </a:defRPr>
+            </a:lvl6pPr>
+            <a:lvl7pPr marL="3200400" marR="0" lvl="6" indent="-317500" algn="l" rtl="0">
+              <a:lnSpc>
+                <a:spcPct val="100000"/>
+              </a:lnSpc>
+              <a:spcBef>
+                <a:spcPts val="0"/>
+              </a:spcBef>
+              <a:spcAft>
+                <a:spcPts val="0"/>
+              </a:spcAft>
+              <a:buClr>
+                <a:schemeClr val="dk2"/>
+              </a:buClr>
+              <a:buSzPts val="1400"/>
+              <a:buFont typeface="Fira Code"/>
+              <a:buChar char="●"/>
+              <a:defRPr sz="1400" b="0" i="0" u="none" strike="noStrike" cap="none">
+                <a:solidFill>
+                  <a:schemeClr val="dk2"/>
+                </a:solidFill>
+                <a:latin typeface="Fira Code"/>
+                <a:ea typeface="Fira Code"/>
+                <a:cs typeface="Fira Code"/>
+                <a:sym typeface="Fira Code"/>
+              </a:defRPr>
+            </a:lvl7pPr>
+            <a:lvl8pPr marL="3657600" marR="0" lvl="7" indent="-317500" algn="l" rtl="0">
+              <a:lnSpc>
+                <a:spcPct val="100000"/>
+              </a:lnSpc>
+              <a:spcBef>
+                <a:spcPts val="0"/>
+              </a:spcBef>
+              <a:spcAft>
+                <a:spcPts val="0"/>
+              </a:spcAft>
+              <a:buClr>
+                <a:schemeClr val="dk2"/>
+              </a:buClr>
+              <a:buSzPts val="1400"/>
+              <a:buFont typeface="Fira Code"/>
+              <a:buChar char="○"/>
+              <a:defRPr sz="1400" b="0" i="0" u="none" strike="noStrike" cap="none">
+                <a:solidFill>
+                  <a:schemeClr val="dk2"/>
+                </a:solidFill>
+                <a:latin typeface="Fira Code"/>
+                <a:ea typeface="Fira Code"/>
+                <a:cs typeface="Fira Code"/>
+                <a:sym typeface="Fira Code"/>
+              </a:defRPr>
+            </a:lvl8pPr>
+            <a:lvl9pPr marL="4114800" marR="0" lvl="8" indent="-317500" algn="l" rtl="0">
+              <a:lnSpc>
+                <a:spcPct val="100000"/>
+              </a:lnSpc>
+              <a:spcBef>
+                <a:spcPts val="0"/>
+              </a:spcBef>
+              <a:spcAft>
+                <a:spcPts val="0"/>
+              </a:spcAft>
+              <a:buClr>
+                <a:schemeClr val="dk2"/>
+              </a:buClr>
+              <a:buSzPts val="1400"/>
+              <a:buFont typeface="Fira Code"/>
+              <a:buChar char="■"/>
+              <a:defRPr sz="1400" b="0" i="0" u="none" strike="noStrike" cap="none">
+                <a:solidFill>
+                  <a:schemeClr val="dk2"/>
+                </a:solidFill>
+                <a:latin typeface="Fira Code"/>
+                <a:ea typeface="Fira Code"/>
+                <a:cs typeface="Fira Code"/>
+                <a:sym typeface="Fira Code"/>
+              </a:defRPr>
+            </a:lvl9pPr>
+          </a:lstStyle>
+          <a:p>
+            <a:pPr marL="0" indent="0">
+              <a:buFont typeface="Fira Code"/>
+              <a:buNone/>
+            </a:pPr>
+            <a:r>
+              <a:rPr lang="en" sz="1100" dirty="0">
+                <a:solidFill>
+                  <a:schemeClr val="accent3"/>
+                </a:solidFill>
+              </a:rPr>
+              <a:t>8</a:t>
+            </a:r>
+            <a:endParaRPr lang="en" dirty="0">
+              <a:solidFill>
+                <a:schemeClr val="accent3"/>
+              </a:solidFill>
+            </a:endParaRPr>
+          </a:p>
+        </p:txBody>
+      </p:sp>
+    </p:spTree>
+    <p:extLst>
+      <p:ext uri="{BB962C8B-B14F-4D97-AF65-F5344CB8AC3E}">
+        <p14:creationId xmlns:p14="http://schemas.microsoft.com/office/powerpoint/2010/main" val="2462575609"/>
+      </p:ext>
+    </p:extLst>
+  </p:cSld>
+  <p:clrMapOvr>
+    <a:masterClrMapping/>
+  </p:clrMapOvr>
+</p:sld>
+</file>
+
 <file path=ppt/slides/slide2.xml><?xml version="1.0" encoding="utf-8"?>
 <p:sld xmlns:a="http://schemas.openxmlformats.org/drawingml/2006/main" xmlns:r="http://schemas.openxmlformats.org/officeDocument/2006/relationships" xmlns:p="http://schemas.openxmlformats.org/presentationml/2006/main">
   <p:cSld>
@@ -6207,7 +6880,7 @@
         <p:spPr>
           <a:xfrm>
             <a:off x="1041255" y="991384"/>
-            <a:ext cx="7756756" cy="1077218"/>
+            <a:ext cx="7756756" cy="954107"/>
           </a:xfrm>
           <a:prstGeom prst="rect">
             <a:avLst/>
@@ -6222,7 +6895,7 @@
           <a:p>
             <a:pPr algn="just"/>
             <a:r>
-              <a:rPr lang="en-US" sz="1600" dirty="0">
+              <a:rPr lang="en-US" dirty="0">
                 <a:solidFill>
                   <a:schemeClr val="accent3"/>
                 </a:solidFill>
@@ -6250,7 +6923,7 @@
         <p:spPr>
           <a:xfrm>
             <a:off x="1438381" y="2241829"/>
-            <a:ext cx="1251122" cy="369332"/>
+            <a:ext cx="1251122" cy="338554"/>
           </a:xfrm>
           <a:prstGeom prst="rect">
             <a:avLst/>
@@ -6264,7 +6937,7 @@
           <a:lstStyle/>
           <a:p>
             <a:r>
-              <a:rPr lang="en-US" sz="1800" b="1" u="sng" dirty="0" err="1">
+              <a:rPr lang="en-US" sz="1600" b="1" u="sng" dirty="0" err="1">
                 <a:solidFill>
                   <a:schemeClr val="bg1">
                     <a:lumMod val="75000"/>
@@ -6304,8 +6977,8 @@
         </p:nvSpPr>
         <p:spPr>
           <a:xfrm>
-            <a:off x="1012073" y="2253861"/>
-            <a:ext cx="426308" cy="357300"/>
+            <a:off x="1072676" y="2267108"/>
+            <a:ext cx="365705" cy="338554"/>
           </a:xfrm>
           <a:prstGeom prst="rightArrow">
             <a:avLst/>
@@ -7025,7 +7698,7 @@
         <p:spPr>
           <a:xfrm>
             <a:off x="949567" y="1050910"/>
-            <a:ext cx="7993294" cy="584775"/>
+            <a:ext cx="7993294" cy="523220"/>
           </a:xfrm>
           <a:prstGeom prst="rect">
             <a:avLst/>
@@ -7051,7 +7724,7 @@
               </a:buClr>
             </a:pPr>
             <a:r>
-              <a:rPr lang="en-US" sz="1600" dirty="0">
+              <a:rPr lang="en-US" dirty="0">
                 <a:solidFill>
                   <a:schemeClr val="accent3"/>
                 </a:solidFill>
@@ -7061,7 +7734,7 @@
               </a:rPr>
               <a:t>Write the pseudocode for swapping two numbers in this environment if the first number is greater than the second.</a:t>
             </a:r>
-            <a:endParaRPr lang="fa-IR" sz="1600" dirty="0">
+            <a:endParaRPr lang="fa-IR" dirty="0">
               <a:solidFill>
                 <a:schemeClr val="accent3"/>
               </a:solidFill>
@@ -10996,7 +11669,7 @@
           <a:p>
             <a:pPr algn="just"/>
             <a:r>
-              <a:rPr lang="en-US" sz="2000" dirty="0">
+              <a:rPr lang="en-US" sz="2400" dirty="0">
                 <a:solidFill>
                   <a:schemeClr val="accent2"/>
                 </a:solidFill>
@@ -11007,15 +11680,6 @@
               </a:rPr>
               <a:t>Output</a:t>
             </a:r>
-            <a:endParaRPr lang="en-US" sz="2400" dirty="0">
-              <a:solidFill>
-                <a:schemeClr val="accent2"/>
-              </a:solidFill>
-              <a:latin typeface="Fira Code"/>
-              <a:ea typeface="Fira Code"/>
-              <a:cs typeface="Fira Code"/>
-              <a:sym typeface="Fira Code"/>
-            </a:endParaRPr>
           </a:p>
           <a:p>
             <a:pPr algn="just"/>
@@ -11166,18 +11830,7 @@
           <a:p>
             <a:pPr algn="just"/>
             <a:r>
-              <a:rPr lang="en-US" sz="1050" dirty="0">
-                <a:solidFill>
-                  <a:srgbClr val="FF0000"/>
-                </a:solidFill>
-                <a:latin typeface="Fira Code"/>
-                <a:ea typeface="Fira Code"/>
-                <a:cs typeface="B Nazanin" panose="00000400000000000000" pitchFamily="2" charset="-78"/>
-              </a:rPr>
-              <a:t>*</a:t>
-            </a:r>
-            <a:r>
-              <a:rPr lang="en-US" sz="1050" b="1" dirty="0">
+              <a:rPr lang="en-US" sz="1200" b="1" dirty="0">
                 <a:solidFill>
                   <a:srgbClr val="FF0000"/>
                 </a:solidFill>
@@ -11185,7 +11838,7 @@
               <a:t>Don't forget to include the </a:t>
             </a:r>
             <a:r>
-              <a:rPr lang="en-US" sz="1050" b="1" dirty="0" err="1">
+              <a:rPr lang="en-US" sz="1200" b="1" dirty="0" err="1">
                 <a:solidFill>
                   <a:srgbClr val="FF0000"/>
                 </a:solidFill>
@@ -11193,14 +11846,14 @@
               <a:t>stdio</a:t>
             </a:r>
             <a:r>
-              <a:rPr lang="en-US" sz="1050" b="1" dirty="0">
+              <a:rPr lang="en-US" sz="1200" b="1" dirty="0">
                 <a:solidFill>
                   <a:srgbClr val="FF0000"/>
                 </a:solidFill>
               </a:rPr>
               <a:t> library in your code.</a:t>
             </a:r>
-            <a:endParaRPr lang="en-US" sz="1050" dirty="0">
+            <a:endParaRPr lang="en-US" sz="1200" dirty="0">
               <a:solidFill>
                 <a:srgbClr val="FF0000"/>
               </a:solidFill>
@@ -11499,18 +12152,13 @@
           </a:lstStyle>
           <a:p>
             <a:r>
-              <a:rPr lang="en-US" sz="2000" dirty="0">
+              <a:rPr lang="en-US" sz="2400" dirty="0">
                 <a:solidFill>
                   <a:schemeClr val="accent2"/>
                 </a:solidFill>
               </a:rPr>
               <a:t>Input</a:t>
             </a:r>
-            <a:endParaRPr lang="en-US" sz="2400" dirty="0">
-              <a:solidFill>
-                <a:schemeClr val="accent2"/>
-              </a:solidFill>
-            </a:endParaRPr>
           </a:p>
         </p:txBody>
       </p:sp>
@@ -14598,7 +15246,7 @@
         </p:nvSpPr>
         <p:spPr>
           <a:xfrm>
-            <a:off x="945292" y="1079606"/>
+            <a:off x="1009175" y="1028897"/>
             <a:ext cx="8007178" cy="3539430"/>
           </a:xfrm>
           <a:prstGeom prst="rect">

--- a/slides/2.Pseudocode/Pseudocode.pptx
+++ b/slides/2.Pseudocode/Pseudocode.pptx
@@ -5,7 +5,7 @@
     <p:sldMasterId id="2147483672" r:id="rId1"/>
   </p:sldMasterIdLst>
   <p:notesMasterIdLst>
-    <p:notesMasterId r:id="rId12"/>
+    <p:notesMasterId r:id="rId14"/>
   </p:notesMasterIdLst>
   <p:sldIdLst>
     <p:sldId id="256" r:id="rId2"/>
@@ -18,28 +18,30 @@
     <p:sldId id="321" r:id="rId9"/>
     <p:sldId id="320" r:id="rId10"/>
     <p:sldId id="322" r:id="rId11"/>
+    <p:sldId id="323" r:id="rId12"/>
+    <p:sldId id="324" r:id="rId13"/>
   </p:sldIdLst>
   <p:sldSz cx="9144000" cy="5143500" type="screen16x9"/>
   <p:notesSz cx="6858000" cy="9144000"/>
   <p:embeddedFontLst>
     <p:embeddedFont>
       <p:font typeface="Consolas" panose="020B0609020204030204" pitchFamily="49" charset="0"/>
-      <p:regular r:id="rId13"/>
-      <p:bold r:id="rId14"/>
-      <p:italic r:id="rId15"/>
-      <p:boldItalic r:id="rId16"/>
+      <p:regular r:id="rId15"/>
+      <p:bold r:id="rId16"/>
+      <p:italic r:id="rId17"/>
+      <p:boldItalic r:id="rId18"/>
     </p:embeddedFont>
     <p:embeddedFont>
       <p:font typeface="Dana" panose="020B0604020202020204" charset="0"/>
-      <p:regular r:id="rId17"/>
-      <p:bold r:id="rId18"/>
-      <p:italic r:id="rId19"/>
-      <p:boldItalic r:id="rId20"/>
+      <p:regular r:id="rId19"/>
+      <p:bold r:id="rId20"/>
+      <p:italic r:id="rId21"/>
+      <p:boldItalic r:id="rId22"/>
     </p:embeddedFont>
     <p:embeddedFont>
       <p:font typeface="Fira Code" panose="020B0809050000020004" pitchFamily="49" charset="0"/>
-      <p:regular r:id="rId21"/>
-      <p:bold r:id="rId22"/>
+      <p:regular r:id="rId23"/>
+      <p:bold r:id="rId24"/>
     </p:embeddedFont>
   </p:embeddedFontLst>
   <p:defaultTextStyle>
@@ -5832,7 +5834,7 @@
         </p:nvSpPr>
         <p:spPr>
           <a:xfrm>
-            <a:off x="957649" y="374362"/>
+            <a:off x="1130643" y="119352"/>
             <a:ext cx="4572000" cy="461665"/>
           </a:xfrm>
           <a:prstGeom prst="rect">
@@ -6454,10 +6456,2331 @@
           </a:p>
         </p:txBody>
       </p:sp>
+      <p:sp>
+        <p:nvSpPr>
+          <p:cNvPr id="4" name="TextBox 3">
+            <a:extLst>
+              <a:ext uri="{FF2B5EF4-FFF2-40B4-BE49-F238E27FC236}">
+                <a16:creationId xmlns:a16="http://schemas.microsoft.com/office/drawing/2014/main" id="{DE38C815-0319-5BC3-4F27-D0D0AE6E5F94}"/>
+              </a:ext>
+            </a:extLst>
+          </p:cNvPr>
+          <p:cNvSpPr txBox="1"/>
+          <p:nvPr/>
+        </p:nvSpPr>
+        <p:spPr>
+          <a:xfrm>
+            <a:off x="1075039" y="715718"/>
+            <a:ext cx="7858898" cy="3816429"/>
+          </a:xfrm>
+          <a:prstGeom prst="rect">
+            <a:avLst/>
+          </a:prstGeom>
+          <a:noFill/>
+        </p:spPr>
+        <p:txBody>
+          <a:bodyPr wrap="square">
+            <a:spAutoFit/>
+          </a:bodyPr>
+          <a:lstStyle/>
+          <a:p>
+            <a:pPr algn="just">
+              <a:lnSpc>
+                <a:spcPct val="150000"/>
+              </a:lnSpc>
+              <a:buNone/>
+            </a:pPr>
+            <a:r>
+              <a:rPr lang="en-US" sz="1200" dirty="0">
+                <a:solidFill>
+                  <a:schemeClr val="accent3"/>
+                </a:solidFill>
+                <a:latin typeface="Fira Code"/>
+                <a:ea typeface="Fira Code"/>
+                <a:cs typeface="B Nazanin" panose="00000400000000000000" pitchFamily="2" charset="-78"/>
+              </a:rPr>
+              <a:t>A class of ten students took a quiz. The grades (integers between 0 and 100) for this quiz are given.</a:t>
+            </a:r>
+            <a:endParaRPr lang="fa-IR" sz="1200" dirty="0">
+              <a:solidFill>
+                <a:schemeClr val="accent3"/>
+              </a:solidFill>
+              <a:latin typeface="Fira Code"/>
+              <a:ea typeface="Fira Code"/>
+              <a:cs typeface="B Nazanin" panose="00000400000000000000" pitchFamily="2" charset="-78"/>
+            </a:endParaRPr>
+          </a:p>
+          <a:p>
+            <a:pPr>
+              <a:lnSpc>
+                <a:spcPct val="150000"/>
+              </a:lnSpc>
+              <a:buNone/>
+            </a:pPr>
+            <a:br>
+              <a:rPr lang="en-US" sz="1200" dirty="0">
+                <a:solidFill>
+                  <a:schemeClr val="accent3"/>
+                </a:solidFill>
+                <a:latin typeface="Fira Code"/>
+                <a:ea typeface="Fira Code"/>
+                <a:cs typeface="B Nazanin" panose="00000400000000000000" pitchFamily="2" charset="-78"/>
+              </a:rPr>
+            </a:br>
+            <a:r>
+              <a:rPr lang="en-US" sz="1200" dirty="0">
+                <a:solidFill>
+                  <a:schemeClr val="accent3"/>
+                </a:solidFill>
+                <a:latin typeface="Fira Code"/>
+                <a:ea typeface="Fira Code"/>
+                <a:cs typeface="B Nazanin" panose="00000400000000000000" pitchFamily="2" charset="-78"/>
+              </a:rPr>
+              <a:t>Your task is to determine the class average.</a:t>
+            </a:r>
+          </a:p>
+          <a:p>
+            <a:pPr>
+              <a:lnSpc>
+                <a:spcPct val="150000"/>
+              </a:lnSpc>
+              <a:buNone/>
+            </a:pPr>
+            <a:r>
+              <a:rPr lang="en-US" sz="1200" dirty="0">
+                <a:solidFill>
+                  <a:schemeClr val="accent3"/>
+                </a:solidFill>
+                <a:latin typeface="Fira Code"/>
+                <a:ea typeface="Fira Code"/>
+                <a:cs typeface="B Nazanin" panose="00000400000000000000" pitchFamily="2" charset="-78"/>
+              </a:rPr>
+              <a:t>Write a pseudocode algorithm that:</a:t>
+            </a:r>
+            <a:endParaRPr lang="fa-IR" sz="1200" dirty="0">
+              <a:solidFill>
+                <a:schemeClr val="accent3"/>
+              </a:solidFill>
+              <a:latin typeface="Fira Code"/>
+              <a:ea typeface="Fira Code"/>
+              <a:cs typeface="B Nazanin" panose="00000400000000000000" pitchFamily="2" charset="-78"/>
+            </a:endParaRPr>
+          </a:p>
+          <a:p>
+            <a:pPr>
+              <a:lnSpc>
+                <a:spcPct val="150000"/>
+              </a:lnSpc>
+              <a:buNone/>
+            </a:pPr>
+            <a:endParaRPr lang="en-US" sz="1200" dirty="0">
+              <a:solidFill>
+                <a:schemeClr val="accent3"/>
+              </a:solidFill>
+              <a:latin typeface="Fira Code"/>
+              <a:ea typeface="Fira Code"/>
+              <a:cs typeface="B Nazanin" panose="00000400000000000000" pitchFamily="2" charset="-78"/>
+            </a:endParaRPr>
+          </a:p>
+          <a:p>
+            <a:pPr>
+              <a:lnSpc>
+                <a:spcPct val="150000"/>
+              </a:lnSpc>
+              <a:buClr>
+                <a:schemeClr val="accent3"/>
+              </a:buClr>
+              <a:buFont typeface="+mj-lt"/>
+              <a:buAutoNum type="arabicPeriod"/>
+            </a:pPr>
+            <a:r>
+              <a:rPr lang="en-US" sz="1200" dirty="0">
+                <a:solidFill>
+                  <a:schemeClr val="accent3"/>
+                </a:solidFill>
+                <a:latin typeface="Fira Code"/>
+                <a:ea typeface="Fira Code"/>
+                <a:cs typeface="B Nazanin" panose="00000400000000000000" pitchFamily="2" charset="-78"/>
+              </a:rPr>
+              <a:t>Inputs the grades of all 10 students (one at a time)</a:t>
+            </a:r>
+          </a:p>
+          <a:p>
+            <a:pPr>
+              <a:lnSpc>
+                <a:spcPct val="150000"/>
+              </a:lnSpc>
+              <a:buClr>
+                <a:schemeClr val="accent3"/>
+              </a:buClr>
+              <a:buFont typeface="+mj-lt"/>
+              <a:buAutoNum type="arabicPeriod"/>
+            </a:pPr>
+            <a:r>
+              <a:rPr lang="en-US" sz="1200" dirty="0">
+                <a:solidFill>
+                  <a:schemeClr val="accent3"/>
+                </a:solidFill>
+                <a:latin typeface="Fira Code"/>
+                <a:ea typeface="Fira Code"/>
+                <a:cs typeface="B Nazanin" panose="00000400000000000000" pitchFamily="2" charset="-78"/>
+              </a:rPr>
+              <a:t>Calculates the average grade</a:t>
+            </a:r>
+          </a:p>
+          <a:p>
+            <a:pPr>
+              <a:lnSpc>
+                <a:spcPct val="150000"/>
+              </a:lnSpc>
+              <a:buClr>
+                <a:schemeClr val="accent3"/>
+              </a:buClr>
+              <a:buFont typeface="+mj-lt"/>
+              <a:buAutoNum type="arabicPeriod"/>
+            </a:pPr>
+            <a:r>
+              <a:rPr lang="en-US" sz="1200" dirty="0">
+                <a:solidFill>
+                  <a:schemeClr val="accent3"/>
+                </a:solidFill>
+                <a:latin typeface="Fira Code"/>
+                <a:ea typeface="Fira Code"/>
+                <a:cs typeface="B Nazanin" panose="00000400000000000000" pitchFamily="2" charset="-78"/>
+              </a:rPr>
+              <a:t>Displays the result</a:t>
+            </a:r>
+            <a:endParaRPr lang="fa-IR" sz="1200" dirty="0">
+              <a:solidFill>
+                <a:schemeClr val="accent3"/>
+              </a:solidFill>
+              <a:latin typeface="Fira Code"/>
+              <a:ea typeface="Fira Code"/>
+              <a:cs typeface="B Nazanin" panose="00000400000000000000" pitchFamily="2" charset="-78"/>
+            </a:endParaRPr>
+          </a:p>
+          <a:p>
+            <a:pPr>
+              <a:lnSpc>
+                <a:spcPct val="150000"/>
+              </a:lnSpc>
+              <a:buClr>
+                <a:schemeClr val="accent3"/>
+              </a:buClr>
+            </a:pPr>
+            <a:endParaRPr lang="en-US" sz="1200" dirty="0">
+              <a:solidFill>
+                <a:schemeClr val="accent3"/>
+              </a:solidFill>
+              <a:latin typeface="Fira Code"/>
+              <a:ea typeface="Fira Code"/>
+              <a:cs typeface="B Nazanin" panose="00000400000000000000" pitchFamily="2" charset="-78"/>
+            </a:endParaRPr>
+          </a:p>
+          <a:p>
+            <a:pPr>
+              <a:buNone/>
+            </a:pPr>
+            <a:r>
+              <a:rPr lang="en-US" sz="1200" dirty="0">
+                <a:solidFill>
+                  <a:schemeClr val="accent3"/>
+                </a:solidFill>
+                <a:latin typeface="Fira Code"/>
+                <a:ea typeface="Fira Code"/>
+                <a:cs typeface="B Nazanin" panose="00000400000000000000" pitchFamily="2" charset="-78"/>
+              </a:rPr>
+              <a:t>You must use counter-controlled repetition in your pseudocode.</a:t>
+            </a:r>
+            <a:endParaRPr lang="fa-IR" sz="1200" dirty="0">
+              <a:solidFill>
+                <a:schemeClr val="accent3"/>
+              </a:solidFill>
+              <a:latin typeface="Fira Code"/>
+              <a:ea typeface="Fira Code"/>
+              <a:cs typeface="B Nazanin" panose="00000400000000000000" pitchFamily="2" charset="-78"/>
+            </a:endParaRPr>
+          </a:p>
+          <a:p>
+            <a:pPr algn="just">
+              <a:buNone/>
+            </a:pPr>
+            <a:br>
+              <a:rPr lang="en-US" sz="1200" dirty="0">
+                <a:solidFill>
+                  <a:schemeClr val="accent3"/>
+                </a:solidFill>
+                <a:latin typeface="Fira Code"/>
+                <a:ea typeface="Fira Code"/>
+                <a:cs typeface="B Nazanin" panose="00000400000000000000" pitchFamily="2" charset="-78"/>
+              </a:rPr>
+            </a:br>
+            <a:r>
+              <a:rPr lang="en-US" sz="1200" dirty="0">
+                <a:solidFill>
+                  <a:schemeClr val="accent3"/>
+                </a:solidFill>
+                <a:latin typeface="Fira Code"/>
+                <a:ea typeface="Fira Code"/>
+                <a:cs typeface="B Nazanin" panose="00000400000000000000" pitchFamily="2" charset="-78"/>
+              </a:rPr>
+              <a:t>This type of repetition is also known as definite repetition, where the number of iterations is known in advance.</a:t>
+            </a:r>
+            <a:endParaRPr lang="fa-IR" sz="1200" dirty="0">
+              <a:solidFill>
+                <a:schemeClr val="accent3"/>
+              </a:solidFill>
+              <a:latin typeface="Fira Code"/>
+              <a:ea typeface="Fira Code"/>
+              <a:cs typeface="B Nazanin" panose="00000400000000000000" pitchFamily="2" charset="-78"/>
+            </a:endParaRPr>
+          </a:p>
+          <a:p>
+            <a:pPr>
+              <a:buNone/>
+            </a:pPr>
+            <a:endParaRPr lang="en-US" dirty="0">
+              <a:solidFill>
+                <a:schemeClr val="accent3"/>
+              </a:solidFill>
+              <a:latin typeface="Fira Code"/>
+              <a:ea typeface="Fira Code"/>
+              <a:cs typeface="B Nazanin" panose="00000400000000000000" pitchFamily="2" charset="-78"/>
+            </a:endParaRPr>
+          </a:p>
+        </p:txBody>
+      </p:sp>
+      <p:sp>
+        <p:nvSpPr>
+          <p:cNvPr id="7" name="TextBox 6">
+            <a:extLst>
+              <a:ext uri="{FF2B5EF4-FFF2-40B4-BE49-F238E27FC236}">
+                <a16:creationId xmlns:a16="http://schemas.microsoft.com/office/drawing/2014/main" id="{C91934DB-3D7B-057C-F9F3-8703350806CF}"/>
+              </a:ext>
+            </a:extLst>
+          </p:cNvPr>
+          <p:cNvSpPr txBox="1"/>
+          <p:nvPr/>
+        </p:nvSpPr>
+        <p:spPr>
+          <a:xfrm>
+            <a:off x="6675021" y="128722"/>
+            <a:ext cx="2576184" cy="246221"/>
+          </a:xfrm>
+          <a:prstGeom prst="rect">
+            <a:avLst/>
+          </a:prstGeom>
+          <a:noFill/>
+        </p:spPr>
+        <p:txBody>
+          <a:bodyPr wrap="square">
+            <a:spAutoFit/>
+          </a:bodyPr>
+          <a:lstStyle/>
+          <a:p>
+            <a:r>
+              <a:rPr lang="en-US" sz="1000" dirty="0">
+                <a:solidFill>
+                  <a:schemeClr val="accent3"/>
+                </a:solidFill>
+                <a:latin typeface="Fira Code"/>
+                <a:ea typeface="Fira Code"/>
+                <a:cs typeface="Fira Code"/>
+                <a:sym typeface="Fira Code"/>
+              </a:rPr>
+              <a:t>HW1</a:t>
+            </a:r>
+          </a:p>
+        </p:txBody>
+      </p:sp>
     </p:spTree>
     <p:extLst>
       <p:ext uri="{BB962C8B-B14F-4D97-AF65-F5344CB8AC3E}">
         <p14:creationId xmlns:p14="http://schemas.microsoft.com/office/powerpoint/2010/main" val="2462575609"/>
+      </p:ext>
+    </p:extLst>
+  </p:cSld>
+  <p:clrMapOvr>
+    <a:masterClrMapping/>
+  </p:clrMapOvr>
+</p:sld>
+</file>
+
+<file path=ppt/slides/slide11.xml><?xml version="1.0" encoding="utf-8"?>
+<p:sld xmlns:a="http://schemas.openxmlformats.org/drawingml/2006/main" xmlns:r="http://schemas.openxmlformats.org/officeDocument/2006/relationships" xmlns:p="http://schemas.openxmlformats.org/presentationml/2006/main">
+  <p:cSld>
+    <p:spTree>
+      <p:nvGrpSpPr>
+        <p:cNvPr id="1" name="">
+          <a:extLst>
+            <a:ext uri="{FF2B5EF4-FFF2-40B4-BE49-F238E27FC236}">
+              <a16:creationId xmlns:a16="http://schemas.microsoft.com/office/drawing/2014/main" id="{6FE9CB14-3F33-9FAB-5288-987C93E0F880}"/>
+            </a:ext>
+          </a:extLst>
+        </p:cNvPr>
+        <p:cNvGrpSpPr/>
+        <p:nvPr/>
+      </p:nvGrpSpPr>
+      <p:grpSpPr>
+        <a:xfrm>
+          <a:off x="0" y="0"/>
+          <a:ext cx="0" cy="0"/>
+          <a:chOff x="0" y="0"/>
+          <a:chExt cx="0" cy="0"/>
+        </a:xfrm>
+      </p:grpSpPr>
+      <p:sp>
+        <p:nvSpPr>
+          <p:cNvPr id="6" name="TextBox 5">
+            <a:extLst>
+              <a:ext uri="{FF2B5EF4-FFF2-40B4-BE49-F238E27FC236}">
+                <a16:creationId xmlns:a16="http://schemas.microsoft.com/office/drawing/2014/main" id="{889EA121-A4F5-8D3D-08D3-9D0F0F5FF3AE}"/>
+              </a:ext>
+            </a:extLst>
+          </p:cNvPr>
+          <p:cNvSpPr txBox="1"/>
+          <p:nvPr/>
+        </p:nvSpPr>
+        <p:spPr>
+          <a:xfrm>
+            <a:off x="1130643" y="119352"/>
+            <a:ext cx="4572000" cy="461665"/>
+          </a:xfrm>
+          <a:prstGeom prst="rect">
+            <a:avLst/>
+          </a:prstGeom>
+          <a:noFill/>
+        </p:spPr>
+        <p:txBody>
+          <a:bodyPr wrap="square">
+            <a:spAutoFit/>
+          </a:bodyPr>
+          <a:lstStyle/>
+          <a:p>
+            <a:r>
+              <a:rPr lang="en-US" sz="2400" dirty="0">
+                <a:solidFill>
+                  <a:schemeClr val="accent2"/>
+                </a:solidFill>
+                <a:latin typeface="Fira Code"/>
+                <a:ea typeface="Fira Code"/>
+                <a:cs typeface="Fira Code"/>
+                <a:sym typeface="Fira Code"/>
+              </a:rPr>
+              <a:t>Home Work</a:t>
+            </a:r>
+          </a:p>
+        </p:txBody>
+      </p:sp>
+      <p:sp>
+        <p:nvSpPr>
+          <p:cNvPr id="3" name="Google Shape;473;p28">
+            <a:extLst>
+              <a:ext uri="{FF2B5EF4-FFF2-40B4-BE49-F238E27FC236}">
+                <a16:creationId xmlns:a16="http://schemas.microsoft.com/office/drawing/2014/main" id="{CB10C8B6-0ACB-E173-9625-76BE6C561E25}"/>
+              </a:ext>
+            </a:extLst>
+          </p:cNvPr>
+          <p:cNvSpPr txBox="1">
+            <a:spLocks/>
+          </p:cNvSpPr>
+          <p:nvPr/>
+        </p:nvSpPr>
+        <p:spPr>
+          <a:xfrm>
+            <a:off x="732739" y="4666848"/>
+            <a:ext cx="4865100" cy="357300"/>
+          </a:xfrm>
+          <a:prstGeom prst="rect">
+            <a:avLst/>
+          </a:prstGeom>
+          <a:noFill/>
+          <a:ln>
+            <a:noFill/>
+          </a:ln>
+        </p:spPr>
+        <p:txBody>
+          <a:bodyPr spcFirstLastPara="1" wrap="square" lIns="91425" tIns="91425" rIns="91425" bIns="91425" anchor="ctr" anchorCtr="0">
+            <a:noAutofit/>
+          </a:bodyPr>
+          <a:lstStyle>
+            <a:defPPr marR="0" lvl="0" algn="l" rtl="0">
+              <a:lnSpc>
+                <a:spcPct val="100000"/>
+              </a:lnSpc>
+              <a:spcBef>
+                <a:spcPts val="0"/>
+              </a:spcBef>
+              <a:spcAft>
+                <a:spcPts val="0"/>
+              </a:spcAft>
+            </a:defPPr>
+            <a:lvl1pPr marL="457200" marR="0" lvl="0" indent="-317500" algn="l" rtl="0">
+              <a:lnSpc>
+                <a:spcPct val="100000"/>
+              </a:lnSpc>
+              <a:spcBef>
+                <a:spcPts val="0"/>
+              </a:spcBef>
+              <a:spcAft>
+                <a:spcPts val="0"/>
+              </a:spcAft>
+              <a:buClr>
+                <a:schemeClr val="dk2"/>
+              </a:buClr>
+              <a:buSzPts val="1400"/>
+              <a:buFont typeface="Fira Code"/>
+              <a:buChar char="●"/>
+              <a:defRPr sz="1400" b="0" i="0" u="none" strike="noStrike" cap="none">
+                <a:solidFill>
+                  <a:schemeClr val="dk2"/>
+                </a:solidFill>
+                <a:latin typeface="Fira Code"/>
+                <a:ea typeface="Fira Code"/>
+                <a:cs typeface="Fira Code"/>
+                <a:sym typeface="Fira Code"/>
+              </a:defRPr>
+            </a:lvl1pPr>
+            <a:lvl2pPr marL="914400" marR="0" lvl="1" indent="-317500" algn="l" rtl="0">
+              <a:lnSpc>
+                <a:spcPct val="100000"/>
+              </a:lnSpc>
+              <a:spcBef>
+                <a:spcPts val="0"/>
+              </a:spcBef>
+              <a:spcAft>
+                <a:spcPts val="0"/>
+              </a:spcAft>
+              <a:buClr>
+                <a:schemeClr val="dk2"/>
+              </a:buClr>
+              <a:buSzPts val="1400"/>
+              <a:buFont typeface="Fira Code"/>
+              <a:buChar char="○"/>
+              <a:defRPr sz="1400" b="0" i="0" u="none" strike="noStrike" cap="none">
+                <a:solidFill>
+                  <a:schemeClr val="dk2"/>
+                </a:solidFill>
+                <a:latin typeface="Fira Code"/>
+                <a:ea typeface="Fira Code"/>
+                <a:cs typeface="Fira Code"/>
+                <a:sym typeface="Fira Code"/>
+              </a:defRPr>
+            </a:lvl2pPr>
+            <a:lvl3pPr marL="1371600" marR="0" lvl="2" indent="-317500" algn="l" rtl="0">
+              <a:lnSpc>
+                <a:spcPct val="100000"/>
+              </a:lnSpc>
+              <a:spcBef>
+                <a:spcPts val="0"/>
+              </a:spcBef>
+              <a:spcAft>
+                <a:spcPts val="0"/>
+              </a:spcAft>
+              <a:buClr>
+                <a:schemeClr val="dk2"/>
+              </a:buClr>
+              <a:buSzPts val="1400"/>
+              <a:buFont typeface="Fira Code"/>
+              <a:buChar char="■"/>
+              <a:defRPr sz="1400" b="0" i="0" u="none" strike="noStrike" cap="none">
+                <a:solidFill>
+                  <a:schemeClr val="dk2"/>
+                </a:solidFill>
+                <a:latin typeface="Fira Code"/>
+                <a:ea typeface="Fira Code"/>
+                <a:cs typeface="Fira Code"/>
+                <a:sym typeface="Fira Code"/>
+              </a:defRPr>
+            </a:lvl3pPr>
+            <a:lvl4pPr marL="1828800" marR="0" lvl="3" indent="-317500" algn="l" rtl="0">
+              <a:lnSpc>
+                <a:spcPct val="100000"/>
+              </a:lnSpc>
+              <a:spcBef>
+                <a:spcPts val="0"/>
+              </a:spcBef>
+              <a:spcAft>
+                <a:spcPts val="0"/>
+              </a:spcAft>
+              <a:buClr>
+                <a:schemeClr val="dk2"/>
+              </a:buClr>
+              <a:buSzPts val="1400"/>
+              <a:buFont typeface="Fira Code"/>
+              <a:buChar char="●"/>
+              <a:defRPr sz="1400" b="0" i="0" u="none" strike="noStrike" cap="none">
+                <a:solidFill>
+                  <a:schemeClr val="dk2"/>
+                </a:solidFill>
+                <a:latin typeface="Fira Code"/>
+                <a:ea typeface="Fira Code"/>
+                <a:cs typeface="Fira Code"/>
+                <a:sym typeface="Fira Code"/>
+              </a:defRPr>
+            </a:lvl4pPr>
+            <a:lvl5pPr marL="2286000" marR="0" lvl="4" indent="-317500" algn="l" rtl="0">
+              <a:lnSpc>
+                <a:spcPct val="100000"/>
+              </a:lnSpc>
+              <a:spcBef>
+                <a:spcPts val="0"/>
+              </a:spcBef>
+              <a:spcAft>
+                <a:spcPts val="0"/>
+              </a:spcAft>
+              <a:buClr>
+                <a:schemeClr val="dk2"/>
+              </a:buClr>
+              <a:buSzPts val="1400"/>
+              <a:buFont typeface="Fira Code"/>
+              <a:buChar char="○"/>
+              <a:defRPr sz="1400" b="0" i="0" u="none" strike="noStrike" cap="none">
+                <a:solidFill>
+                  <a:schemeClr val="dk2"/>
+                </a:solidFill>
+                <a:latin typeface="Fira Code"/>
+                <a:ea typeface="Fira Code"/>
+                <a:cs typeface="Fira Code"/>
+                <a:sym typeface="Fira Code"/>
+              </a:defRPr>
+            </a:lvl5pPr>
+            <a:lvl6pPr marL="2743200" marR="0" lvl="5" indent="-317500" algn="l" rtl="0">
+              <a:lnSpc>
+                <a:spcPct val="100000"/>
+              </a:lnSpc>
+              <a:spcBef>
+                <a:spcPts val="0"/>
+              </a:spcBef>
+              <a:spcAft>
+                <a:spcPts val="0"/>
+              </a:spcAft>
+              <a:buClr>
+                <a:schemeClr val="dk2"/>
+              </a:buClr>
+              <a:buSzPts val="1400"/>
+              <a:buFont typeface="Fira Code"/>
+              <a:buChar char="■"/>
+              <a:defRPr sz="1400" b="0" i="0" u="none" strike="noStrike" cap="none">
+                <a:solidFill>
+                  <a:schemeClr val="dk2"/>
+                </a:solidFill>
+                <a:latin typeface="Fira Code"/>
+                <a:ea typeface="Fira Code"/>
+                <a:cs typeface="Fira Code"/>
+                <a:sym typeface="Fira Code"/>
+              </a:defRPr>
+            </a:lvl6pPr>
+            <a:lvl7pPr marL="3200400" marR="0" lvl="6" indent="-317500" algn="l" rtl="0">
+              <a:lnSpc>
+                <a:spcPct val="100000"/>
+              </a:lnSpc>
+              <a:spcBef>
+                <a:spcPts val="0"/>
+              </a:spcBef>
+              <a:spcAft>
+                <a:spcPts val="0"/>
+              </a:spcAft>
+              <a:buClr>
+                <a:schemeClr val="dk2"/>
+              </a:buClr>
+              <a:buSzPts val="1400"/>
+              <a:buFont typeface="Fira Code"/>
+              <a:buChar char="●"/>
+              <a:defRPr sz="1400" b="0" i="0" u="none" strike="noStrike" cap="none">
+                <a:solidFill>
+                  <a:schemeClr val="dk2"/>
+                </a:solidFill>
+                <a:latin typeface="Fira Code"/>
+                <a:ea typeface="Fira Code"/>
+                <a:cs typeface="Fira Code"/>
+                <a:sym typeface="Fira Code"/>
+              </a:defRPr>
+            </a:lvl7pPr>
+            <a:lvl8pPr marL="3657600" marR="0" lvl="7" indent="-317500" algn="l" rtl="0">
+              <a:lnSpc>
+                <a:spcPct val="100000"/>
+              </a:lnSpc>
+              <a:spcBef>
+                <a:spcPts val="0"/>
+              </a:spcBef>
+              <a:spcAft>
+                <a:spcPts val="0"/>
+              </a:spcAft>
+              <a:buClr>
+                <a:schemeClr val="dk2"/>
+              </a:buClr>
+              <a:buSzPts val="1400"/>
+              <a:buFont typeface="Fira Code"/>
+              <a:buChar char="○"/>
+              <a:defRPr sz="1400" b="0" i="0" u="none" strike="noStrike" cap="none">
+                <a:solidFill>
+                  <a:schemeClr val="dk2"/>
+                </a:solidFill>
+                <a:latin typeface="Fira Code"/>
+                <a:ea typeface="Fira Code"/>
+                <a:cs typeface="Fira Code"/>
+                <a:sym typeface="Fira Code"/>
+              </a:defRPr>
+            </a:lvl8pPr>
+            <a:lvl9pPr marL="4114800" marR="0" lvl="8" indent="-317500" algn="l" rtl="0">
+              <a:lnSpc>
+                <a:spcPct val="100000"/>
+              </a:lnSpc>
+              <a:spcBef>
+                <a:spcPts val="0"/>
+              </a:spcBef>
+              <a:spcAft>
+                <a:spcPts val="0"/>
+              </a:spcAft>
+              <a:buClr>
+                <a:schemeClr val="dk2"/>
+              </a:buClr>
+              <a:buSzPts val="1400"/>
+              <a:buFont typeface="Fira Code"/>
+              <a:buChar char="■"/>
+              <a:defRPr sz="1400" b="0" i="0" u="none" strike="noStrike" cap="none">
+                <a:solidFill>
+                  <a:schemeClr val="dk2"/>
+                </a:solidFill>
+                <a:latin typeface="Fira Code"/>
+                <a:ea typeface="Fira Code"/>
+                <a:cs typeface="Fira Code"/>
+                <a:sym typeface="Fira Code"/>
+              </a:defRPr>
+            </a:lvl9pPr>
+          </a:lstStyle>
+          <a:p>
+            <a:pPr marL="0" indent="0">
+              <a:buFont typeface="Fira Code"/>
+              <a:buNone/>
+            </a:pPr>
+            <a:r>
+              <a:rPr lang="en-US" dirty="0">
+                <a:solidFill>
+                  <a:schemeClr val="accent3"/>
+                </a:solidFill>
+              </a:rPr>
+              <a:t>Programming Language Lab</a:t>
+            </a:r>
+          </a:p>
+        </p:txBody>
+      </p:sp>
+      <p:sp>
+        <p:nvSpPr>
+          <p:cNvPr id="5" name="Google Shape;473;p28">
+            <a:extLst>
+              <a:ext uri="{FF2B5EF4-FFF2-40B4-BE49-F238E27FC236}">
+                <a16:creationId xmlns:a16="http://schemas.microsoft.com/office/drawing/2014/main" id="{5C8A7404-86FD-D703-2B25-8AC8C388A309}"/>
+              </a:ext>
+            </a:extLst>
+          </p:cNvPr>
+          <p:cNvSpPr txBox="1">
+            <a:spLocks/>
+          </p:cNvSpPr>
+          <p:nvPr/>
+        </p:nvSpPr>
+        <p:spPr>
+          <a:xfrm>
+            <a:off x="8433851" y="4694675"/>
+            <a:ext cx="319124" cy="357300"/>
+          </a:xfrm>
+          <a:prstGeom prst="rect">
+            <a:avLst/>
+          </a:prstGeom>
+          <a:noFill/>
+          <a:ln>
+            <a:noFill/>
+          </a:ln>
+        </p:spPr>
+        <p:txBody>
+          <a:bodyPr spcFirstLastPara="1" wrap="square" lIns="91425" tIns="91425" rIns="91425" bIns="91425" anchor="ctr" anchorCtr="0">
+            <a:noAutofit/>
+          </a:bodyPr>
+          <a:lstStyle>
+            <a:defPPr marR="0" lvl="0" algn="l" rtl="0">
+              <a:lnSpc>
+                <a:spcPct val="100000"/>
+              </a:lnSpc>
+              <a:spcBef>
+                <a:spcPts val="0"/>
+              </a:spcBef>
+              <a:spcAft>
+                <a:spcPts val="0"/>
+              </a:spcAft>
+            </a:defPPr>
+            <a:lvl1pPr marL="457200" marR="0" lvl="0" indent="-317500" algn="l" rtl="0">
+              <a:lnSpc>
+                <a:spcPct val="100000"/>
+              </a:lnSpc>
+              <a:spcBef>
+                <a:spcPts val="0"/>
+              </a:spcBef>
+              <a:spcAft>
+                <a:spcPts val="0"/>
+              </a:spcAft>
+              <a:buClr>
+                <a:schemeClr val="dk2"/>
+              </a:buClr>
+              <a:buSzPts val="1400"/>
+              <a:buFont typeface="Fira Code"/>
+              <a:buChar char="●"/>
+              <a:defRPr sz="1400" b="0" i="0" u="none" strike="noStrike" cap="none">
+                <a:solidFill>
+                  <a:schemeClr val="dk2"/>
+                </a:solidFill>
+                <a:latin typeface="Fira Code"/>
+                <a:ea typeface="Fira Code"/>
+                <a:cs typeface="Fira Code"/>
+                <a:sym typeface="Fira Code"/>
+              </a:defRPr>
+            </a:lvl1pPr>
+            <a:lvl2pPr marL="914400" marR="0" lvl="1" indent="-317500" algn="l" rtl="0">
+              <a:lnSpc>
+                <a:spcPct val="100000"/>
+              </a:lnSpc>
+              <a:spcBef>
+                <a:spcPts val="0"/>
+              </a:spcBef>
+              <a:spcAft>
+                <a:spcPts val="0"/>
+              </a:spcAft>
+              <a:buClr>
+                <a:schemeClr val="dk2"/>
+              </a:buClr>
+              <a:buSzPts val="1400"/>
+              <a:buFont typeface="Fira Code"/>
+              <a:buChar char="○"/>
+              <a:defRPr sz="1400" b="0" i="0" u="none" strike="noStrike" cap="none">
+                <a:solidFill>
+                  <a:schemeClr val="dk2"/>
+                </a:solidFill>
+                <a:latin typeface="Fira Code"/>
+                <a:ea typeface="Fira Code"/>
+                <a:cs typeface="Fira Code"/>
+                <a:sym typeface="Fira Code"/>
+              </a:defRPr>
+            </a:lvl2pPr>
+            <a:lvl3pPr marL="1371600" marR="0" lvl="2" indent="-317500" algn="l" rtl="0">
+              <a:lnSpc>
+                <a:spcPct val="100000"/>
+              </a:lnSpc>
+              <a:spcBef>
+                <a:spcPts val="0"/>
+              </a:spcBef>
+              <a:spcAft>
+                <a:spcPts val="0"/>
+              </a:spcAft>
+              <a:buClr>
+                <a:schemeClr val="dk2"/>
+              </a:buClr>
+              <a:buSzPts val="1400"/>
+              <a:buFont typeface="Fira Code"/>
+              <a:buChar char="■"/>
+              <a:defRPr sz="1400" b="0" i="0" u="none" strike="noStrike" cap="none">
+                <a:solidFill>
+                  <a:schemeClr val="dk2"/>
+                </a:solidFill>
+                <a:latin typeface="Fira Code"/>
+                <a:ea typeface="Fira Code"/>
+                <a:cs typeface="Fira Code"/>
+                <a:sym typeface="Fira Code"/>
+              </a:defRPr>
+            </a:lvl3pPr>
+            <a:lvl4pPr marL="1828800" marR="0" lvl="3" indent="-317500" algn="l" rtl="0">
+              <a:lnSpc>
+                <a:spcPct val="100000"/>
+              </a:lnSpc>
+              <a:spcBef>
+                <a:spcPts val="0"/>
+              </a:spcBef>
+              <a:spcAft>
+                <a:spcPts val="0"/>
+              </a:spcAft>
+              <a:buClr>
+                <a:schemeClr val="dk2"/>
+              </a:buClr>
+              <a:buSzPts val="1400"/>
+              <a:buFont typeface="Fira Code"/>
+              <a:buChar char="●"/>
+              <a:defRPr sz="1400" b="0" i="0" u="none" strike="noStrike" cap="none">
+                <a:solidFill>
+                  <a:schemeClr val="dk2"/>
+                </a:solidFill>
+                <a:latin typeface="Fira Code"/>
+                <a:ea typeface="Fira Code"/>
+                <a:cs typeface="Fira Code"/>
+                <a:sym typeface="Fira Code"/>
+              </a:defRPr>
+            </a:lvl4pPr>
+            <a:lvl5pPr marL="2286000" marR="0" lvl="4" indent="-317500" algn="l" rtl="0">
+              <a:lnSpc>
+                <a:spcPct val="100000"/>
+              </a:lnSpc>
+              <a:spcBef>
+                <a:spcPts val="0"/>
+              </a:spcBef>
+              <a:spcAft>
+                <a:spcPts val="0"/>
+              </a:spcAft>
+              <a:buClr>
+                <a:schemeClr val="dk2"/>
+              </a:buClr>
+              <a:buSzPts val="1400"/>
+              <a:buFont typeface="Fira Code"/>
+              <a:buChar char="○"/>
+              <a:defRPr sz="1400" b="0" i="0" u="none" strike="noStrike" cap="none">
+                <a:solidFill>
+                  <a:schemeClr val="dk2"/>
+                </a:solidFill>
+                <a:latin typeface="Fira Code"/>
+                <a:ea typeface="Fira Code"/>
+                <a:cs typeface="Fira Code"/>
+                <a:sym typeface="Fira Code"/>
+              </a:defRPr>
+            </a:lvl5pPr>
+            <a:lvl6pPr marL="2743200" marR="0" lvl="5" indent="-317500" algn="l" rtl="0">
+              <a:lnSpc>
+                <a:spcPct val="100000"/>
+              </a:lnSpc>
+              <a:spcBef>
+                <a:spcPts val="0"/>
+              </a:spcBef>
+              <a:spcAft>
+                <a:spcPts val="0"/>
+              </a:spcAft>
+              <a:buClr>
+                <a:schemeClr val="dk2"/>
+              </a:buClr>
+              <a:buSzPts val="1400"/>
+              <a:buFont typeface="Fira Code"/>
+              <a:buChar char="■"/>
+              <a:defRPr sz="1400" b="0" i="0" u="none" strike="noStrike" cap="none">
+                <a:solidFill>
+                  <a:schemeClr val="dk2"/>
+                </a:solidFill>
+                <a:latin typeface="Fira Code"/>
+                <a:ea typeface="Fira Code"/>
+                <a:cs typeface="Fira Code"/>
+                <a:sym typeface="Fira Code"/>
+              </a:defRPr>
+            </a:lvl6pPr>
+            <a:lvl7pPr marL="3200400" marR="0" lvl="6" indent="-317500" algn="l" rtl="0">
+              <a:lnSpc>
+                <a:spcPct val="100000"/>
+              </a:lnSpc>
+              <a:spcBef>
+                <a:spcPts val="0"/>
+              </a:spcBef>
+              <a:spcAft>
+                <a:spcPts val="0"/>
+              </a:spcAft>
+              <a:buClr>
+                <a:schemeClr val="dk2"/>
+              </a:buClr>
+              <a:buSzPts val="1400"/>
+              <a:buFont typeface="Fira Code"/>
+              <a:buChar char="●"/>
+              <a:defRPr sz="1400" b="0" i="0" u="none" strike="noStrike" cap="none">
+                <a:solidFill>
+                  <a:schemeClr val="dk2"/>
+                </a:solidFill>
+                <a:latin typeface="Fira Code"/>
+                <a:ea typeface="Fira Code"/>
+                <a:cs typeface="Fira Code"/>
+                <a:sym typeface="Fira Code"/>
+              </a:defRPr>
+            </a:lvl7pPr>
+            <a:lvl8pPr marL="3657600" marR="0" lvl="7" indent="-317500" algn="l" rtl="0">
+              <a:lnSpc>
+                <a:spcPct val="100000"/>
+              </a:lnSpc>
+              <a:spcBef>
+                <a:spcPts val="0"/>
+              </a:spcBef>
+              <a:spcAft>
+                <a:spcPts val="0"/>
+              </a:spcAft>
+              <a:buClr>
+                <a:schemeClr val="dk2"/>
+              </a:buClr>
+              <a:buSzPts val="1400"/>
+              <a:buFont typeface="Fira Code"/>
+              <a:buChar char="○"/>
+              <a:defRPr sz="1400" b="0" i="0" u="none" strike="noStrike" cap="none">
+                <a:solidFill>
+                  <a:schemeClr val="dk2"/>
+                </a:solidFill>
+                <a:latin typeface="Fira Code"/>
+                <a:ea typeface="Fira Code"/>
+                <a:cs typeface="Fira Code"/>
+                <a:sym typeface="Fira Code"/>
+              </a:defRPr>
+            </a:lvl8pPr>
+            <a:lvl9pPr marL="4114800" marR="0" lvl="8" indent="-317500" algn="l" rtl="0">
+              <a:lnSpc>
+                <a:spcPct val="100000"/>
+              </a:lnSpc>
+              <a:spcBef>
+                <a:spcPts val="0"/>
+              </a:spcBef>
+              <a:spcAft>
+                <a:spcPts val="0"/>
+              </a:spcAft>
+              <a:buClr>
+                <a:schemeClr val="dk2"/>
+              </a:buClr>
+              <a:buSzPts val="1400"/>
+              <a:buFont typeface="Fira Code"/>
+              <a:buChar char="■"/>
+              <a:defRPr sz="1400" b="0" i="0" u="none" strike="noStrike" cap="none">
+                <a:solidFill>
+                  <a:schemeClr val="dk2"/>
+                </a:solidFill>
+                <a:latin typeface="Fira Code"/>
+                <a:ea typeface="Fira Code"/>
+                <a:cs typeface="Fira Code"/>
+                <a:sym typeface="Fira Code"/>
+              </a:defRPr>
+            </a:lvl9pPr>
+          </a:lstStyle>
+          <a:p>
+            <a:pPr marL="0" indent="0">
+              <a:buFont typeface="Fira Code"/>
+              <a:buNone/>
+            </a:pPr>
+            <a:r>
+              <a:rPr lang="en" sz="1100" dirty="0">
+                <a:solidFill>
+                  <a:schemeClr val="accent3"/>
+                </a:solidFill>
+              </a:rPr>
+              <a:t>8</a:t>
+            </a:r>
+            <a:endParaRPr lang="en" dirty="0">
+              <a:solidFill>
+                <a:schemeClr val="accent3"/>
+              </a:solidFill>
+            </a:endParaRPr>
+          </a:p>
+        </p:txBody>
+      </p:sp>
+      <p:sp>
+        <p:nvSpPr>
+          <p:cNvPr id="4" name="TextBox 3">
+            <a:extLst>
+              <a:ext uri="{FF2B5EF4-FFF2-40B4-BE49-F238E27FC236}">
+                <a16:creationId xmlns:a16="http://schemas.microsoft.com/office/drawing/2014/main" id="{A4B067EA-BBC3-8065-4A3E-464017B482CF}"/>
+              </a:ext>
+            </a:extLst>
+          </p:cNvPr>
+          <p:cNvSpPr txBox="1"/>
+          <p:nvPr/>
+        </p:nvSpPr>
+        <p:spPr>
+          <a:xfrm>
+            <a:off x="1062681" y="777501"/>
+            <a:ext cx="7858898" cy="2492990"/>
+          </a:xfrm>
+          <a:prstGeom prst="rect">
+            <a:avLst/>
+          </a:prstGeom>
+          <a:noFill/>
+        </p:spPr>
+        <p:txBody>
+          <a:bodyPr wrap="square">
+            <a:spAutoFit/>
+          </a:bodyPr>
+          <a:lstStyle/>
+          <a:p>
+            <a:pPr lvl="0" algn="just" eaLnBrk="0" fontAlgn="base" hangingPunct="0">
+              <a:spcBef>
+                <a:spcPct val="0"/>
+              </a:spcBef>
+              <a:spcAft>
+                <a:spcPct val="0"/>
+              </a:spcAft>
+              <a:buClrTx/>
+            </a:pPr>
+            <a:r>
+              <a:rPr lang="en-US" altLang="en-US" sz="1200" dirty="0">
+                <a:solidFill>
+                  <a:schemeClr val="accent3"/>
+                </a:solidFill>
+                <a:latin typeface="Fira Code"/>
+                <a:ea typeface="Fira Code"/>
+                <a:cs typeface="B Nazanin" panose="00000400000000000000" pitchFamily="2" charset="-78"/>
+              </a:rPr>
+              <a:t>You are asked to generalize the class-average problem.</a:t>
+            </a:r>
+          </a:p>
+          <a:p>
+            <a:pPr lvl="0" algn="just" eaLnBrk="0" fontAlgn="base" hangingPunct="0">
+              <a:spcBef>
+                <a:spcPct val="0"/>
+              </a:spcBef>
+              <a:spcAft>
+                <a:spcPct val="0"/>
+              </a:spcAft>
+              <a:buClrTx/>
+            </a:pPr>
+            <a:endParaRPr lang="en-US" altLang="en-US" sz="1200" dirty="0">
+              <a:solidFill>
+                <a:schemeClr val="accent3"/>
+              </a:solidFill>
+              <a:latin typeface="Fira Code"/>
+              <a:ea typeface="Fira Code"/>
+              <a:cs typeface="B Nazanin" panose="00000400000000000000" pitchFamily="2" charset="-78"/>
+            </a:endParaRPr>
+          </a:p>
+          <a:p>
+            <a:pPr lvl="0" algn="just" eaLnBrk="0" fontAlgn="base" hangingPunct="0">
+              <a:spcBef>
+                <a:spcPct val="0"/>
+              </a:spcBef>
+              <a:spcAft>
+                <a:spcPct val="0"/>
+              </a:spcAft>
+              <a:buClrTx/>
+            </a:pPr>
+            <a:r>
+              <a:rPr lang="en-US" altLang="en-US" sz="1200" dirty="0">
+                <a:solidFill>
+                  <a:schemeClr val="accent3"/>
+                </a:solidFill>
+                <a:latin typeface="Fira Code"/>
+                <a:ea typeface="Fira Code"/>
+                <a:cs typeface="B Nazanin" panose="00000400000000000000" pitchFamily="2" charset="-78"/>
+              </a:rPr>
+              <a:t>In the previous version of the problem, the number of grades (e.g., 10) was known in advance. However, now you need to develop a class-averaging program that processes an arbitrary number of grades.</a:t>
+            </a:r>
+          </a:p>
+          <a:p>
+            <a:pPr lvl="0" algn="just" eaLnBrk="0" fontAlgn="base" hangingPunct="0">
+              <a:spcBef>
+                <a:spcPct val="0"/>
+              </a:spcBef>
+              <a:spcAft>
+                <a:spcPct val="0"/>
+              </a:spcAft>
+              <a:buClrTx/>
+            </a:pPr>
+            <a:endParaRPr lang="en-US" altLang="en-US" sz="1200" dirty="0">
+              <a:solidFill>
+                <a:schemeClr val="accent3"/>
+              </a:solidFill>
+              <a:latin typeface="Fira Code"/>
+              <a:ea typeface="Fira Code"/>
+              <a:cs typeface="B Nazanin" panose="00000400000000000000" pitchFamily="2" charset="-78"/>
+            </a:endParaRPr>
+          </a:p>
+          <a:p>
+            <a:pPr lvl="0" algn="just" eaLnBrk="0" fontAlgn="base" hangingPunct="0">
+              <a:spcBef>
+                <a:spcPct val="0"/>
+              </a:spcBef>
+              <a:spcAft>
+                <a:spcPct val="0"/>
+              </a:spcAft>
+              <a:buClrTx/>
+            </a:pPr>
+            <a:r>
+              <a:rPr lang="en-US" altLang="en-US" sz="1200" dirty="0">
+                <a:solidFill>
+                  <a:schemeClr val="accent3"/>
+                </a:solidFill>
+                <a:latin typeface="Fira Code"/>
+                <a:ea typeface="Fira Code"/>
+                <a:cs typeface="B Nazanin" panose="00000400000000000000" pitchFamily="2" charset="-78"/>
+              </a:rPr>
+              <a:t>Since the number of grades is not known before execution, the program must keep reading grades until the user enters a sentinel value to indicate the end of input. Grades are non-negative integers (0 to 100), and the sentinel value -1 should be used to stop input.</a:t>
+            </a:r>
+          </a:p>
+          <a:p>
+            <a:pPr lvl="0" algn="just" eaLnBrk="0" fontAlgn="base" hangingPunct="0">
+              <a:spcBef>
+                <a:spcPct val="0"/>
+              </a:spcBef>
+              <a:spcAft>
+                <a:spcPct val="0"/>
+              </a:spcAft>
+              <a:buClrTx/>
+            </a:pPr>
+            <a:endParaRPr lang="en-US" altLang="en-US" sz="1200" dirty="0">
+              <a:solidFill>
+                <a:schemeClr val="accent3"/>
+              </a:solidFill>
+              <a:latin typeface="Fira Code"/>
+              <a:ea typeface="Fira Code"/>
+              <a:cs typeface="B Nazanin" panose="00000400000000000000" pitchFamily="2" charset="-78"/>
+            </a:endParaRPr>
+          </a:p>
+          <a:p>
+            <a:pPr lvl="0" algn="just" eaLnBrk="0" fontAlgn="base" hangingPunct="0">
+              <a:spcBef>
+                <a:spcPct val="0"/>
+              </a:spcBef>
+              <a:spcAft>
+                <a:spcPct val="0"/>
+              </a:spcAft>
+              <a:buClrTx/>
+            </a:pPr>
+            <a:r>
+              <a:rPr lang="en-US" altLang="en-US" sz="1200" dirty="0">
+                <a:solidFill>
+                  <a:schemeClr val="accent3"/>
+                </a:solidFill>
+                <a:latin typeface="Fira Code"/>
+                <a:ea typeface="Fira Code"/>
+                <a:cs typeface="B Nazanin" panose="00000400000000000000" pitchFamily="2" charset="-78"/>
+              </a:rPr>
+              <a:t>The program should then calculate and display the average grade of all valid inputs (excluding the sentinel)</a:t>
+            </a:r>
+          </a:p>
+        </p:txBody>
+      </p:sp>
+      <p:sp>
+        <p:nvSpPr>
+          <p:cNvPr id="7" name="TextBox 6">
+            <a:extLst>
+              <a:ext uri="{FF2B5EF4-FFF2-40B4-BE49-F238E27FC236}">
+                <a16:creationId xmlns:a16="http://schemas.microsoft.com/office/drawing/2014/main" id="{962DFA57-205C-9E8A-8227-11DA074B0327}"/>
+              </a:ext>
+            </a:extLst>
+          </p:cNvPr>
+          <p:cNvSpPr txBox="1"/>
+          <p:nvPr/>
+        </p:nvSpPr>
+        <p:spPr>
+          <a:xfrm>
+            <a:off x="6675021" y="128722"/>
+            <a:ext cx="2576184" cy="246221"/>
+          </a:xfrm>
+          <a:prstGeom prst="rect">
+            <a:avLst/>
+          </a:prstGeom>
+          <a:noFill/>
+        </p:spPr>
+        <p:txBody>
+          <a:bodyPr wrap="square">
+            <a:spAutoFit/>
+          </a:bodyPr>
+          <a:lstStyle/>
+          <a:p>
+            <a:r>
+              <a:rPr lang="en-US" sz="1000" dirty="0">
+                <a:solidFill>
+                  <a:schemeClr val="accent3"/>
+                </a:solidFill>
+                <a:latin typeface="Fira Code"/>
+                <a:ea typeface="Fira Code"/>
+                <a:cs typeface="Fira Code"/>
+                <a:sym typeface="Fira Code"/>
+              </a:rPr>
+              <a:t>HW2</a:t>
+            </a:r>
+          </a:p>
+        </p:txBody>
+      </p:sp>
+    </p:spTree>
+    <p:extLst>
+      <p:ext uri="{BB962C8B-B14F-4D97-AF65-F5344CB8AC3E}">
+        <p14:creationId xmlns:p14="http://schemas.microsoft.com/office/powerpoint/2010/main" val="3028964893"/>
+      </p:ext>
+    </p:extLst>
+  </p:cSld>
+  <p:clrMapOvr>
+    <a:masterClrMapping/>
+  </p:clrMapOvr>
+</p:sld>
+</file>
+
+<file path=ppt/slides/slide12.xml><?xml version="1.0" encoding="utf-8"?>
+<p:sld xmlns:a="http://schemas.openxmlformats.org/drawingml/2006/main" xmlns:r="http://schemas.openxmlformats.org/officeDocument/2006/relationships" xmlns:p="http://schemas.openxmlformats.org/presentationml/2006/main">
+  <p:cSld>
+    <p:spTree>
+      <p:nvGrpSpPr>
+        <p:cNvPr id="1" name="">
+          <a:extLst>
+            <a:ext uri="{FF2B5EF4-FFF2-40B4-BE49-F238E27FC236}">
+              <a16:creationId xmlns:a16="http://schemas.microsoft.com/office/drawing/2014/main" id="{7ECBF9C9-660A-44A9-638F-B99CCC02521C}"/>
+            </a:ext>
+          </a:extLst>
+        </p:cNvPr>
+        <p:cNvGrpSpPr/>
+        <p:nvPr/>
+      </p:nvGrpSpPr>
+      <p:grpSpPr>
+        <a:xfrm>
+          <a:off x="0" y="0"/>
+          <a:ext cx="0" cy="0"/>
+          <a:chOff x="0" y="0"/>
+          <a:chExt cx="0" cy="0"/>
+        </a:xfrm>
+      </p:grpSpPr>
+      <p:sp>
+        <p:nvSpPr>
+          <p:cNvPr id="6" name="TextBox 5">
+            <a:extLst>
+              <a:ext uri="{FF2B5EF4-FFF2-40B4-BE49-F238E27FC236}">
+                <a16:creationId xmlns:a16="http://schemas.microsoft.com/office/drawing/2014/main" id="{F10CE8C1-6925-EFAB-B6DB-D86DA9F235D6}"/>
+              </a:ext>
+            </a:extLst>
+          </p:cNvPr>
+          <p:cNvSpPr txBox="1"/>
+          <p:nvPr/>
+        </p:nvSpPr>
+        <p:spPr>
+          <a:xfrm>
+            <a:off x="1130643" y="119352"/>
+            <a:ext cx="4572000" cy="461665"/>
+          </a:xfrm>
+          <a:prstGeom prst="rect">
+            <a:avLst/>
+          </a:prstGeom>
+          <a:noFill/>
+        </p:spPr>
+        <p:txBody>
+          <a:bodyPr wrap="square">
+            <a:spAutoFit/>
+          </a:bodyPr>
+          <a:lstStyle/>
+          <a:p>
+            <a:r>
+              <a:rPr lang="en-US" sz="2400" dirty="0">
+                <a:solidFill>
+                  <a:schemeClr val="accent2"/>
+                </a:solidFill>
+                <a:latin typeface="Fira Code"/>
+                <a:ea typeface="Fira Code"/>
+                <a:cs typeface="Fira Code"/>
+                <a:sym typeface="Fira Code"/>
+              </a:rPr>
+              <a:t>Home Work</a:t>
+            </a:r>
+          </a:p>
+        </p:txBody>
+      </p:sp>
+      <p:sp>
+        <p:nvSpPr>
+          <p:cNvPr id="3" name="Google Shape;473;p28">
+            <a:extLst>
+              <a:ext uri="{FF2B5EF4-FFF2-40B4-BE49-F238E27FC236}">
+                <a16:creationId xmlns:a16="http://schemas.microsoft.com/office/drawing/2014/main" id="{E1139450-54CC-2DC9-10E0-E1F80A4FAD8F}"/>
+              </a:ext>
+            </a:extLst>
+          </p:cNvPr>
+          <p:cNvSpPr txBox="1">
+            <a:spLocks/>
+          </p:cNvSpPr>
+          <p:nvPr/>
+        </p:nvSpPr>
+        <p:spPr>
+          <a:xfrm>
+            <a:off x="732739" y="4666848"/>
+            <a:ext cx="4865100" cy="357300"/>
+          </a:xfrm>
+          <a:prstGeom prst="rect">
+            <a:avLst/>
+          </a:prstGeom>
+          <a:noFill/>
+          <a:ln>
+            <a:noFill/>
+          </a:ln>
+        </p:spPr>
+        <p:txBody>
+          <a:bodyPr spcFirstLastPara="1" wrap="square" lIns="91425" tIns="91425" rIns="91425" bIns="91425" anchor="ctr" anchorCtr="0">
+            <a:noAutofit/>
+          </a:bodyPr>
+          <a:lstStyle>
+            <a:defPPr marR="0" lvl="0" algn="l" rtl="0">
+              <a:lnSpc>
+                <a:spcPct val="100000"/>
+              </a:lnSpc>
+              <a:spcBef>
+                <a:spcPts val="0"/>
+              </a:spcBef>
+              <a:spcAft>
+                <a:spcPts val="0"/>
+              </a:spcAft>
+            </a:defPPr>
+            <a:lvl1pPr marL="457200" marR="0" lvl="0" indent="-317500" algn="l" rtl="0">
+              <a:lnSpc>
+                <a:spcPct val="100000"/>
+              </a:lnSpc>
+              <a:spcBef>
+                <a:spcPts val="0"/>
+              </a:spcBef>
+              <a:spcAft>
+                <a:spcPts val="0"/>
+              </a:spcAft>
+              <a:buClr>
+                <a:schemeClr val="dk2"/>
+              </a:buClr>
+              <a:buSzPts val="1400"/>
+              <a:buFont typeface="Fira Code"/>
+              <a:buChar char="●"/>
+              <a:defRPr sz="1400" b="0" i="0" u="none" strike="noStrike" cap="none">
+                <a:solidFill>
+                  <a:schemeClr val="dk2"/>
+                </a:solidFill>
+                <a:latin typeface="Fira Code"/>
+                <a:ea typeface="Fira Code"/>
+                <a:cs typeface="Fira Code"/>
+                <a:sym typeface="Fira Code"/>
+              </a:defRPr>
+            </a:lvl1pPr>
+            <a:lvl2pPr marL="914400" marR="0" lvl="1" indent="-317500" algn="l" rtl="0">
+              <a:lnSpc>
+                <a:spcPct val="100000"/>
+              </a:lnSpc>
+              <a:spcBef>
+                <a:spcPts val="0"/>
+              </a:spcBef>
+              <a:spcAft>
+                <a:spcPts val="0"/>
+              </a:spcAft>
+              <a:buClr>
+                <a:schemeClr val="dk2"/>
+              </a:buClr>
+              <a:buSzPts val="1400"/>
+              <a:buFont typeface="Fira Code"/>
+              <a:buChar char="○"/>
+              <a:defRPr sz="1400" b="0" i="0" u="none" strike="noStrike" cap="none">
+                <a:solidFill>
+                  <a:schemeClr val="dk2"/>
+                </a:solidFill>
+                <a:latin typeface="Fira Code"/>
+                <a:ea typeface="Fira Code"/>
+                <a:cs typeface="Fira Code"/>
+                <a:sym typeface="Fira Code"/>
+              </a:defRPr>
+            </a:lvl2pPr>
+            <a:lvl3pPr marL="1371600" marR="0" lvl="2" indent="-317500" algn="l" rtl="0">
+              <a:lnSpc>
+                <a:spcPct val="100000"/>
+              </a:lnSpc>
+              <a:spcBef>
+                <a:spcPts val="0"/>
+              </a:spcBef>
+              <a:spcAft>
+                <a:spcPts val="0"/>
+              </a:spcAft>
+              <a:buClr>
+                <a:schemeClr val="dk2"/>
+              </a:buClr>
+              <a:buSzPts val="1400"/>
+              <a:buFont typeface="Fira Code"/>
+              <a:buChar char="■"/>
+              <a:defRPr sz="1400" b="0" i="0" u="none" strike="noStrike" cap="none">
+                <a:solidFill>
+                  <a:schemeClr val="dk2"/>
+                </a:solidFill>
+                <a:latin typeface="Fira Code"/>
+                <a:ea typeface="Fira Code"/>
+                <a:cs typeface="Fira Code"/>
+                <a:sym typeface="Fira Code"/>
+              </a:defRPr>
+            </a:lvl3pPr>
+            <a:lvl4pPr marL="1828800" marR="0" lvl="3" indent="-317500" algn="l" rtl="0">
+              <a:lnSpc>
+                <a:spcPct val="100000"/>
+              </a:lnSpc>
+              <a:spcBef>
+                <a:spcPts val="0"/>
+              </a:spcBef>
+              <a:spcAft>
+                <a:spcPts val="0"/>
+              </a:spcAft>
+              <a:buClr>
+                <a:schemeClr val="dk2"/>
+              </a:buClr>
+              <a:buSzPts val="1400"/>
+              <a:buFont typeface="Fira Code"/>
+              <a:buChar char="●"/>
+              <a:defRPr sz="1400" b="0" i="0" u="none" strike="noStrike" cap="none">
+                <a:solidFill>
+                  <a:schemeClr val="dk2"/>
+                </a:solidFill>
+                <a:latin typeface="Fira Code"/>
+                <a:ea typeface="Fira Code"/>
+                <a:cs typeface="Fira Code"/>
+                <a:sym typeface="Fira Code"/>
+              </a:defRPr>
+            </a:lvl4pPr>
+            <a:lvl5pPr marL="2286000" marR="0" lvl="4" indent="-317500" algn="l" rtl="0">
+              <a:lnSpc>
+                <a:spcPct val="100000"/>
+              </a:lnSpc>
+              <a:spcBef>
+                <a:spcPts val="0"/>
+              </a:spcBef>
+              <a:spcAft>
+                <a:spcPts val="0"/>
+              </a:spcAft>
+              <a:buClr>
+                <a:schemeClr val="dk2"/>
+              </a:buClr>
+              <a:buSzPts val="1400"/>
+              <a:buFont typeface="Fira Code"/>
+              <a:buChar char="○"/>
+              <a:defRPr sz="1400" b="0" i="0" u="none" strike="noStrike" cap="none">
+                <a:solidFill>
+                  <a:schemeClr val="dk2"/>
+                </a:solidFill>
+                <a:latin typeface="Fira Code"/>
+                <a:ea typeface="Fira Code"/>
+                <a:cs typeface="Fira Code"/>
+                <a:sym typeface="Fira Code"/>
+              </a:defRPr>
+            </a:lvl5pPr>
+            <a:lvl6pPr marL="2743200" marR="0" lvl="5" indent="-317500" algn="l" rtl="0">
+              <a:lnSpc>
+                <a:spcPct val="100000"/>
+              </a:lnSpc>
+              <a:spcBef>
+                <a:spcPts val="0"/>
+              </a:spcBef>
+              <a:spcAft>
+                <a:spcPts val="0"/>
+              </a:spcAft>
+              <a:buClr>
+                <a:schemeClr val="dk2"/>
+              </a:buClr>
+              <a:buSzPts val="1400"/>
+              <a:buFont typeface="Fira Code"/>
+              <a:buChar char="■"/>
+              <a:defRPr sz="1400" b="0" i="0" u="none" strike="noStrike" cap="none">
+                <a:solidFill>
+                  <a:schemeClr val="dk2"/>
+                </a:solidFill>
+                <a:latin typeface="Fira Code"/>
+                <a:ea typeface="Fira Code"/>
+                <a:cs typeface="Fira Code"/>
+                <a:sym typeface="Fira Code"/>
+              </a:defRPr>
+            </a:lvl6pPr>
+            <a:lvl7pPr marL="3200400" marR="0" lvl="6" indent="-317500" algn="l" rtl="0">
+              <a:lnSpc>
+                <a:spcPct val="100000"/>
+              </a:lnSpc>
+              <a:spcBef>
+                <a:spcPts val="0"/>
+              </a:spcBef>
+              <a:spcAft>
+                <a:spcPts val="0"/>
+              </a:spcAft>
+              <a:buClr>
+                <a:schemeClr val="dk2"/>
+              </a:buClr>
+              <a:buSzPts val="1400"/>
+              <a:buFont typeface="Fira Code"/>
+              <a:buChar char="●"/>
+              <a:defRPr sz="1400" b="0" i="0" u="none" strike="noStrike" cap="none">
+                <a:solidFill>
+                  <a:schemeClr val="dk2"/>
+                </a:solidFill>
+                <a:latin typeface="Fira Code"/>
+                <a:ea typeface="Fira Code"/>
+                <a:cs typeface="Fira Code"/>
+                <a:sym typeface="Fira Code"/>
+              </a:defRPr>
+            </a:lvl7pPr>
+            <a:lvl8pPr marL="3657600" marR="0" lvl="7" indent="-317500" algn="l" rtl="0">
+              <a:lnSpc>
+                <a:spcPct val="100000"/>
+              </a:lnSpc>
+              <a:spcBef>
+                <a:spcPts val="0"/>
+              </a:spcBef>
+              <a:spcAft>
+                <a:spcPts val="0"/>
+              </a:spcAft>
+              <a:buClr>
+                <a:schemeClr val="dk2"/>
+              </a:buClr>
+              <a:buSzPts val="1400"/>
+              <a:buFont typeface="Fira Code"/>
+              <a:buChar char="○"/>
+              <a:defRPr sz="1400" b="0" i="0" u="none" strike="noStrike" cap="none">
+                <a:solidFill>
+                  <a:schemeClr val="dk2"/>
+                </a:solidFill>
+                <a:latin typeface="Fira Code"/>
+                <a:ea typeface="Fira Code"/>
+                <a:cs typeface="Fira Code"/>
+                <a:sym typeface="Fira Code"/>
+              </a:defRPr>
+            </a:lvl8pPr>
+            <a:lvl9pPr marL="4114800" marR="0" lvl="8" indent="-317500" algn="l" rtl="0">
+              <a:lnSpc>
+                <a:spcPct val="100000"/>
+              </a:lnSpc>
+              <a:spcBef>
+                <a:spcPts val="0"/>
+              </a:spcBef>
+              <a:spcAft>
+                <a:spcPts val="0"/>
+              </a:spcAft>
+              <a:buClr>
+                <a:schemeClr val="dk2"/>
+              </a:buClr>
+              <a:buSzPts val="1400"/>
+              <a:buFont typeface="Fira Code"/>
+              <a:buChar char="■"/>
+              <a:defRPr sz="1400" b="0" i="0" u="none" strike="noStrike" cap="none">
+                <a:solidFill>
+                  <a:schemeClr val="dk2"/>
+                </a:solidFill>
+                <a:latin typeface="Fira Code"/>
+                <a:ea typeface="Fira Code"/>
+                <a:cs typeface="Fira Code"/>
+                <a:sym typeface="Fira Code"/>
+              </a:defRPr>
+            </a:lvl9pPr>
+          </a:lstStyle>
+          <a:p>
+            <a:pPr marL="0" indent="0">
+              <a:buFont typeface="Fira Code"/>
+              <a:buNone/>
+            </a:pPr>
+            <a:r>
+              <a:rPr lang="en-US" dirty="0">
+                <a:solidFill>
+                  <a:schemeClr val="accent3"/>
+                </a:solidFill>
+              </a:rPr>
+              <a:t>Programming Language Lab</a:t>
+            </a:r>
+          </a:p>
+        </p:txBody>
+      </p:sp>
+      <p:sp>
+        <p:nvSpPr>
+          <p:cNvPr id="5" name="Google Shape;473;p28">
+            <a:extLst>
+              <a:ext uri="{FF2B5EF4-FFF2-40B4-BE49-F238E27FC236}">
+                <a16:creationId xmlns:a16="http://schemas.microsoft.com/office/drawing/2014/main" id="{0DAAB46C-7BE3-E2EB-6F8F-25CFBEDB8CC4}"/>
+              </a:ext>
+            </a:extLst>
+          </p:cNvPr>
+          <p:cNvSpPr txBox="1">
+            <a:spLocks/>
+          </p:cNvSpPr>
+          <p:nvPr/>
+        </p:nvSpPr>
+        <p:spPr>
+          <a:xfrm>
+            <a:off x="8433851" y="4694675"/>
+            <a:ext cx="319124" cy="357300"/>
+          </a:xfrm>
+          <a:prstGeom prst="rect">
+            <a:avLst/>
+          </a:prstGeom>
+          <a:noFill/>
+          <a:ln>
+            <a:noFill/>
+          </a:ln>
+        </p:spPr>
+        <p:txBody>
+          <a:bodyPr spcFirstLastPara="1" wrap="square" lIns="91425" tIns="91425" rIns="91425" bIns="91425" anchor="ctr" anchorCtr="0">
+            <a:noAutofit/>
+          </a:bodyPr>
+          <a:lstStyle>
+            <a:defPPr marR="0" lvl="0" algn="l" rtl="0">
+              <a:lnSpc>
+                <a:spcPct val="100000"/>
+              </a:lnSpc>
+              <a:spcBef>
+                <a:spcPts val="0"/>
+              </a:spcBef>
+              <a:spcAft>
+                <a:spcPts val="0"/>
+              </a:spcAft>
+            </a:defPPr>
+            <a:lvl1pPr marL="457200" marR="0" lvl="0" indent="-317500" algn="l" rtl="0">
+              <a:lnSpc>
+                <a:spcPct val="100000"/>
+              </a:lnSpc>
+              <a:spcBef>
+                <a:spcPts val="0"/>
+              </a:spcBef>
+              <a:spcAft>
+                <a:spcPts val="0"/>
+              </a:spcAft>
+              <a:buClr>
+                <a:schemeClr val="dk2"/>
+              </a:buClr>
+              <a:buSzPts val="1400"/>
+              <a:buFont typeface="Fira Code"/>
+              <a:buChar char="●"/>
+              <a:defRPr sz="1400" b="0" i="0" u="none" strike="noStrike" cap="none">
+                <a:solidFill>
+                  <a:schemeClr val="dk2"/>
+                </a:solidFill>
+                <a:latin typeface="Fira Code"/>
+                <a:ea typeface="Fira Code"/>
+                <a:cs typeface="Fira Code"/>
+                <a:sym typeface="Fira Code"/>
+              </a:defRPr>
+            </a:lvl1pPr>
+            <a:lvl2pPr marL="914400" marR="0" lvl="1" indent="-317500" algn="l" rtl="0">
+              <a:lnSpc>
+                <a:spcPct val="100000"/>
+              </a:lnSpc>
+              <a:spcBef>
+                <a:spcPts val="0"/>
+              </a:spcBef>
+              <a:spcAft>
+                <a:spcPts val="0"/>
+              </a:spcAft>
+              <a:buClr>
+                <a:schemeClr val="dk2"/>
+              </a:buClr>
+              <a:buSzPts val="1400"/>
+              <a:buFont typeface="Fira Code"/>
+              <a:buChar char="○"/>
+              <a:defRPr sz="1400" b="0" i="0" u="none" strike="noStrike" cap="none">
+                <a:solidFill>
+                  <a:schemeClr val="dk2"/>
+                </a:solidFill>
+                <a:latin typeface="Fira Code"/>
+                <a:ea typeface="Fira Code"/>
+                <a:cs typeface="Fira Code"/>
+                <a:sym typeface="Fira Code"/>
+              </a:defRPr>
+            </a:lvl2pPr>
+            <a:lvl3pPr marL="1371600" marR="0" lvl="2" indent="-317500" algn="l" rtl="0">
+              <a:lnSpc>
+                <a:spcPct val="100000"/>
+              </a:lnSpc>
+              <a:spcBef>
+                <a:spcPts val="0"/>
+              </a:spcBef>
+              <a:spcAft>
+                <a:spcPts val="0"/>
+              </a:spcAft>
+              <a:buClr>
+                <a:schemeClr val="dk2"/>
+              </a:buClr>
+              <a:buSzPts val="1400"/>
+              <a:buFont typeface="Fira Code"/>
+              <a:buChar char="■"/>
+              <a:defRPr sz="1400" b="0" i="0" u="none" strike="noStrike" cap="none">
+                <a:solidFill>
+                  <a:schemeClr val="dk2"/>
+                </a:solidFill>
+                <a:latin typeface="Fira Code"/>
+                <a:ea typeface="Fira Code"/>
+                <a:cs typeface="Fira Code"/>
+                <a:sym typeface="Fira Code"/>
+              </a:defRPr>
+            </a:lvl3pPr>
+            <a:lvl4pPr marL="1828800" marR="0" lvl="3" indent="-317500" algn="l" rtl="0">
+              <a:lnSpc>
+                <a:spcPct val="100000"/>
+              </a:lnSpc>
+              <a:spcBef>
+                <a:spcPts val="0"/>
+              </a:spcBef>
+              <a:spcAft>
+                <a:spcPts val="0"/>
+              </a:spcAft>
+              <a:buClr>
+                <a:schemeClr val="dk2"/>
+              </a:buClr>
+              <a:buSzPts val="1400"/>
+              <a:buFont typeface="Fira Code"/>
+              <a:buChar char="●"/>
+              <a:defRPr sz="1400" b="0" i="0" u="none" strike="noStrike" cap="none">
+                <a:solidFill>
+                  <a:schemeClr val="dk2"/>
+                </a:solidFill>
+                <a:latin typeface="Fira Code"/>
+                <a:ea typeface="Fira Code"/>
+                <a:cs typeface="Fira Code"/>
+                <a:sym typeface="Fira Code"/>
+              </a:defRPr>
+            </a:lvl4pPr>
+            <a:lvl5pPr marL="2286000" marR="0" lvl="4" indent="-317500" algn="l" rtl="0">
+              <a:lnSpc>
+                <a:spcPct val="100000"/>
+              </a:lnSpc>
+              <a:spcBef>
+                <a:spcPts val="0"/>
+              </a:spcBef>
+              <a:spcAft>
+                <a:spcPts val="0"/>
+              </a:spcAft>
+              <a:buClr>
+                <a:schemeClr val="dk2"/>
+              </a:buClr>
+              <a:buSzPts val="1400"/>
+              <a:buFont typeface="Fira Code"/>
+              <a:buChar char="○"/>
+              <a:defRPr sz="1400" b="0" i="0" u="none" strike="noStrike" cap="none">
+                <a:solidFill>
+                  <a:schemeClr val="dk2"/>
+                </a:solidFill>
+                <a:latin typeface="Fira Code"/>
+                <a:ea typeface="Fira Code"/>
+                <a:cs typeface="Fira Code"/>
+                <a:sym typeface="Fira Code"/>
+              </a:defRPr>
+            </a:lvl5pPr>
+            <a:lvl6pPr marL="2743200" marR="0" lvl="5" indent="-317500" algn="l" rtl="0">
+              <a:lnSpc>
+                <a:spcPct val="100000"/>
+              </a:lnSpc>
+              <a:spcBef>
+                <a:spcPts val="0"/>
+              </a:spcBef>
+              <a:spcAft>
+                <a:spcPts val="0"/>
+              </a:spcAft>
+              <a:buClr>
+                <a:schemeClr val="dk2"/>
+              </a:buClr>
+              <a:buSzPts val="1400"/>
+              <a:buFont typeface="Fira Code"/>
+              <a:buChar char="■"/>
+              <a:defRPr sz="1400" b="0" i="0" u="none" strike="noStrike" cap="none">
+                <a:solidFill>
+                  <a:schemeClr val="dk2"/>
+                </a:solidFill>
+                <a:latin typeface="Fira Code"/>
+                <a:ea typeface="Fira Code"/>
+                <a:cs typeface="Fira Code"/>
+                <a:sym typeface="Fira Code"/>
+              </a:defRPr>
+            </a:lvl6pPr>
+            <a:lvl7pPr marL="3200400" marR="0" lvl="6" indent="-317500" algn="l" rtl="0">
+              <a:lnSpc>
+                <a:spcPct val="100000"/>
+              </a:lnSpc>
+              <a:spcBef>
+                <a:spcPts val="0"/>
+              </a:spcBef>
+              <a:spcAft>
+                <a:spcPts val="0"/>
+              </a:spcAft>
+              <a:buClr>
+                <a:schemeClr val="dk2"/>
+              </a:buClr>
+              <a:buSzPts val="1400"/>
+              <a:buFont typeface="Fira Code"/>
+              <a:buChar char="●"/>
+              <a:defRPr sz="1400" b="0" i="0" u="none" strike="noStrike" cap="none">
+                <a:solidFill>
+                  <a:schemeClr val="dk2"/>
+                </a:solidFill>
+                <a:latin typeface="Fira Code"/>
+                <a:ea typeface="Fira Code"/>
+                <a:cs typeface="Fira Code"/>
+                <a:sym typeface="Fira Code"/>
+              </a:defRPr>
+            </a:lvl7pPr>
+            <a:lvl8pPr marL="3657600" marR="0" lvl="7" indent="-317500" algn="l" rtl="0">
+              <a:lnSpc>
+                <a:spcPct val="100000"/>
+              </a:lnSpc>
+              <a:spcBef>
+                <a:spcPts val="0"/>
+              </a:spcBef>
+              <a:spcAft>
+                <a:spcPts val="0"/>
+              </a:spcAft>
+              <a:buClr>
+                <a:schemeClr val="dk2"/>
+              </a:buClr>
+              <a:buSzPts val="1400"/>
+              <a:buFont typeface="Fira Code"/>
+              <a:buChar char="○"/>
+              <a:defRPr sz="1400" b="0" i="0" u="none" strike="noStrike" cap="none">
+                <a:solidFill>
+                  <a:schemeClr val="dk2"/>
+                </a:solidFill>
+                <a:latin typeface="Fira Code"/>
+                <a:ea typeface="Fira Code"/>
+                <a:cs typeface="Fira Code"/>
+                <a:sym typeface="Fira Code"/>
+              </a:defRPr>
+            </a:lvl8pPr>
+            <a:lvl9pPr marL="4114800" marR="0" lvl="8" indent="-317500" algn="l" rtl="0">
+              <a:lnSpc>
+                <a:spcPct val="100000"/>
+              </a:lnSpc>
+              <a:spcBef>
+                <a:spcPts val="0"/>
+              </a:spcBef>
+              <a:spcAft>
+                <a:spcPts val="0"/>
+              </a:spcAft>
+              <a:buClr>
+                <a:schemeClr val="dk2"/>
+              </a:buClr>
+              <a:buSzPts val="1400"/>
+              <a:buFont typeface="Fira Code"/>
+              <a:buChar char="■"/>
+              <a:defRPr sz="1400" b="0" i="0" u="none" strike="noStrike" cap="none">
+                <a:solidFill>
+                  <a:schemeClr val="dk2"/>
+                </a:solidFill>
+                <a:latin typeface="Fira Code"/>
+                <a:ea typeface="Fira Code"/>
+                <a:cs typeface="Fira Code"/>
+                <a:sym typeface="Fira Code"/>
+              </a:defRPr>
+            </a:lvl9pPr>
+          </a:lstStyle>
+          <a:p>
+            <a:pPr marL="0" indent="0">
+              <a:buFont typeface="Fira Code"/>
+              <a:buNone/>
+            </a:pPr>
+            <a:r>
+              <a:rPr lang="en" sz="1100" dirty="0">
+                <a:solidFill>
+                  <a:schemeClr val="accent3"/>
+                </a:solidFill>
+              </a:rPr>
+              <a:t>8</a:t>
+            </a:r>
+            <a:endParaRPr lang="en" dirty="0">
+              <a:solidFill>
+                <a:schemeClr val="accent3"/>
+              </a:solidFill>
+            </a:endParaRPr>
+          </a:p>
+        </p:txBody>
+      </p:sp>
+      <p:sp>
+        <p:nvSpPr>
+          <p:cNvPr id="4" name="TextBox 3">
+            <a:extLst>
+              <a:ext uri="{FF2B5EF4-FFF2-40B4-BE49-F238E27FC236}">
+                <a16:creationId xmlns:a16="http://schemas.microsoft.com/office/drawing/2014/main" id="{8A6E03C9-0AB6-2113-EA63-ECE070D1A899}"/>
+              </a:ext>
+            </a:extLst>
+          </p:cNvPr>
+          <p:cNvSpPr txBox="1"/>
+          <p:nvPr/>
+        </p:nvSpPr>
+        <p:spPr>
+          <a:xfrm>
+            <a:off x="1198605" y="888711"/>
+            <a:ext cx="7858898" cy="1569660"/>
+          </a:xfrm>
+          <a:prstGeom prst="rect">
+            <a:avLst/>
+          </a:prstGeom>
+          <a:noFill/>
+        </p:spPr>
+        <p:txBody>
+          <a:bodyPr wrap="square">
+            <a:spAutoFit/>
+          </a:bodyPr>
+          <a:lstStyle/>
+          <a:p>
+            <a:r>
+              <a:rPr lang="en-US" sz="1200" dirty="0">
+                <a:solidFill>
+                  <a:schemeClr val="accent3"/>
+                </a:solidFill>
+                <a:latin typeface="Fira Code"/>
+                <a:ea typeface="Fira Code"/>
+                <a:cs typeface="B Nazanin" panose="00000400000000000000" pitchFamily="2" charset="-78"/>
+              </a:rPr>
+              <a:t>Your Task:</a:t>
+            </a:r>
+          </a:p>
+          <a:p>
+            <a:endParaRPr lang="en-US" sz="1200" dirty="0">
+              <a:solidFill>
+                <a:schemeClr val="accent3"/>
+              </a:solidFill>
+              <a:latin typeface="Fira Code"/>
+              <a:ea typeface="Fira Code"/>
+              <a:cs typeface="B Nazanin" panose="00000400000000000000" pitchFamily="2" charset="-78"/>
+            </a:endParaRPr>
+          </a:p>
+          <a:p>
+            <a:r>
+              <a:rPr lang="en-US" sz="1200" dirty="0">
+                <a:solidFill>
+                  <a:schemeClr val="accent3"/>
+                </a:solidFill>
+                <a:latin typeface="Fira Code"/>
+                <a:ea typeface="Fira Code"/>
+                <a:cs typeface="B Nazanin" panose="00000400000000000000" pitchFamily="2" charset="-78"/>
+              </a:rPr>
+              <a:t>Write a pseudocode algorithm that:</a:t>
+            </a:r>
+          </a:p>
+          <a:p>
+            <a:endParaRPr lang="en-US" sz="1200" dirty="0">
+              <a:solidFill>
+                <a:schemeClr val="accent3"/>
+              </a:solidFill>
+              <a:latin typeface="Fira Code"/>
+              <a:ea typeface="Fira Code"/>
+              <a:cs typeface="B Nazanin" panose="00000400000000000000" pitchFamily="2" charset="-78"/>
+            </a:endParaRPr>
+          </a:p>
+          <a:p>
+            <a:pPr marL="228600" indent="-228600">
+              <a:buClr>
+                <a:schemeClr val="accent3"/>
+              </a:buClr>
+              <a:buFont typeface="+mj-lt"/>
+              <a:buAutoNum type="arabicPeriod"/>
+            </a:pPr>
+            <a:r>
+              <a:rPr lang="en-US" sz="1200" dirty="0">
+                <a:solidFill>
+                  <a:schemeClr val="accent3"/>
+                </a:solidFill>
+                <a:latin typeface="Fira Code"/>
+                <a:ea typeface="Fira Code"/>
+                <a:cs typeface="B Nazanin" panose="00000400000000000000" pitchFamily="2" charset="-78"/>
+              </a:rPr>
+              <a:t>Initializes all required variables properly</a:t>
+            </a:r>
+          </a:p>
+          <a:p>
+            <a:pPr marL="228600" indent="-228600">
+              <a:buClr>
+                <a:schemeClr val="accent3"/>
+              </a:buClr>
+              <a:buFont typeface="+mj-lt"/>
+              <a:buAutoNum type="arabicPeriod"/>
+            </a:pPr>
+            <a:r>
+              <a:rPr lang="en-US" sz="1200" dirty="0">
+                <a:solidFill>
+                  <a:schemeClr val="accent3"/>
+                </a:solidFill>
+                <a:latin typeface="Fira Code"/>
+                <a:ea typeface="Fira Code"/>
+                <a:cs typeface="B Nazanin" panose="00000400000000000000" pitchFamily="2" charset="-78"/>
+              </a:rPr>
+              <a:t>Uses sentinel-controlled repetition to input grades</a:t>
+            </a:r>
+          </a:p>
+          <a:p>
+            <a:pPr marL="228600" indent="-228600">
+              <a:buClr>
+                <a:schemeClr val="accent3"/>
+              </a:buClr>
+              <a:buFont typeface="+mj-lt"/>
+              <a:buAutoNum type="arabicPeriod"/>
+            </a:pPr>
+            <a:r>
+              <a:rPr lang="en-US" sz="1200" dirty="0">
+                <a:solidFill>
+                  <a:schemeClr val="accent3"/>
+                </a:solidFill>
+                <a:latin typeface="Fira Code"/>
+                <a:ea typeface="Fira Code"/>
+                <a:cs typeface="B Nazanin" panose="00000400000000000000" pitchFamily="2" charset="-78"/>
+              </a:rPr>
+              <a:t>Validates that division by zero does not occur</a:t>
+            </a:r>
+          </a:p>
+          <a:p>
+            <a:pPr marL="228600" indent="-228600">
+              <a:buClr>
+                <a:schemeClr val="accent3"/>
+              </a:buClr>
+              <a:buFont typeface="+mj-lt"/>
+              <a:buAutoNum type="arabicPeriod"/>
+            </a:pPr>
+            <a:r>
+              <a:rPr lang="en-US" sz="1200" dirty="0">
+                <a:solidFill>
+                  <a:schemeClr val="accent3"/>
+                </a:solidFill>
+                <a:latin typeface="Fira Code"/>
+                <a:ea typeface="Fira Code"/>
+                <a:cs typeface="B Nazanin" panose="00000400000000000000" pitchFamily="2" charset="-78"/>
+              </a:rPr>
+              <a:t>Calculates and displays the average grade</a:t>
+            </a:r>
+          </a:p>
+        </p:txBody>
+      </p:sp>
+      <p:sp>
+        <p:nvSpPr>
+          <p:cNvPr id="7" name="TextBox 6">
+            <a:extLst>
+              <a:ext uri="{FF2B5EF4-FFF2-40B4-BE49-F238E27FC236}">
+                <a16:creationId xmlns:a16="http://schemas.microsoft.com/office/drawing/2014/main" id="{BE1385D3-FF6A-E20B-D8A5-BF44FBC71680}"/>
+              </a:ext>
+            </a:extLst>
+          </p:cNvPr>
+          <p:cNvSpPr txBox="1"/>
+          <p:nvPr/>
+        </p:nvSpPr>
+        <p:spPr>
+          <a:xfrm>
+            <a:off x="6675021" y="128722"/>
+            <a:ext cx="2576184" cy="246221"/>
+          </a:xfrm>
+          <a:prstGeom prst="rect">
+            <a:avLst/>
+          </a:prstGeom>
+          <a:noFill/>
+        </p:spPr>
+        <p:txBody>
+          <a:bodyPr wrap="square">
+            <a:spAutoFit/>
+          </a:bodyPr>
+          <a:lstStyle/>
+          <a:p>
+            <a:r>
+              <a:rPr lang="en-US" sz="1000" dirty="0">
+                <a:solidFill>
+                  <a:schemeClr val="accent3"/>
+                </a:solidFill>
+                <a:latin typeface="Fira Code"/>
+                <a:ea typeface="Fira Code"/>
+                <a:cs typeface="Fira Code"/>
+                <a:sym typeface="Fira Code"/>
+              </a:rPr>
+              <a:t>HW2</a:t>
+            </a:r>
+          </a:p>
+        </p:txBody>
+      </p:sp>
+      <p:sp>
+        <p:nvSpPr>
+          <p:cNvPr id="10" name="Rectangle: Rounded Corners 9">
+            <a:extLst>
+              <a:ext uri="{FF2B5EF4-FFF2-40B4-BE49-F238E27FC236}">
+                <a16:creationId xmlns:a16="http://schemas.microsoft.com/office/drawing/2014/main" id="{D0C0B0C0-0C24-14AA-AAC0-84A4C54A1BAB}"/>
+              </a:ext>
+            </a:extLst>
+          </p:cNvPr>
+          <p:cNvSpPr/>
+          <p:nvPr/>
+        </p:nvSpPr>
+        <p:spPr>
+          <a:xfrm>
+            <a:off x="1198605" y="3044444"/>
+            <a:ext cx="3645244" cy="1365422"/>
+          </a:xfrm>
+          <a:prstGeom prst="roundRect">
+            <a:avLst/>
+          </a:prstGeom>
+          <a:solidFill>
+            <a:schemeClr val="accent5"/>
+          </a:solidFill>
+          <a:ln>
+            <a:noFill/>
+          </a:ln>
+        </p:spPr>
+        <p:style>
+          <a:lnRef idx="0">
+            <a:scrgbClr r="0" g="0" b="0"/>
+          </a:lnRef>
+          <a:fillRef idx="0">
+            <a:scrgbClr r="0" g="0" b="0"/>
+          </a:fillRef>
+          <a:effectRef idx="0">
+            <a:scrgbClr r="0" g="0" b="0"/>
+          </a:effectRef>
+          <a:fontRef idx="minor">
+            <a:schemeClr val="lt1"/>
+          </a:fontRef>
+        </p:style>
+        <p:txBody>
+          <a:bodyPr rtlCol="0" anchor="ctr"/>
+          <a:lstStyle/>
+          <a:p>
+            <a:r>
+              <a:rPr lang="en-US"/>
+              <a:t>Enter grade: 95  </a:t>
+            </a:r>
+          </a:p>
+          <a:p>
+            <a:r>
+              <a:rPr lang="en-US"/>
+              <a:t>Enter grade: 83  </a:t>
+            </a:r>
+          </a:p>
+          <a:p>
+            <a:r>
+              <a:rPr lang="en-US"/>
+              <a:t>Enter grade: 74  </a:t>
+            </a:r>
+          </a:p>
+          <a:p>
+            <a:r>
+              <a:rPr lang="en-US"/>
+              <a:t>Enter grade: 100  </a:t>
+            </a:r>
+          </a:p>
+          <a:p>
+            <a:r>
+              <a:rPr lang="en-US"/>
+              <a:t>Enter grade: -1</a:t>
+            </a:r>
+            <a:endParaRPr lang="en-US" dirty="0"/>
+          </a:p>
+        </p:txBody>
+      </p:sp>
+      <p:sp>
+        <p:nvSpPr>
+          <p:cNvPr id="11" name="Rectangle: Rounded Corners 10">
+            <a:extLst>
+              <a:ext uri="{FF2B5EF4-FFF2-40B4-BE49-F238E27FC236}">
+                <a16:creationId xmlns:a16="http://schemas.microsoft.com/office/drawing/2014/main" id="{5D3F279F-995C-3ADB-D52F-249A490DF60C}"/>
+              </a:ext>
+            </a:extLst>
+          </p:cNvPr>
+          <p:cNvSpPr/>
+          <p:nvPr/>
+        </p:nvSpPr>
+        <p:spPr>
+          <a:xfrm>
+            <a:off x="5329881" y="3044445"/>
+            <a:ext cx="3645244" cy="1365421"/>
+          </a:xfrm>
+          <a:prstGeom prst="roundRect">
+            <a:avLst/>
+          </a:prstGeom>
+          <a:solidFill>
+            <a:schemeClr val="accent5"/>
+          </a:solidFill>
+          <a:ln>
+            <a:noFill/>
+          </a:ln>
+        </p:spPr>
+        <p:style>
+          <a:lnRef idx="0">
+            <a:scrgbClr r="0" g="0" b="0"/>
+          </a:lnRef>
+          <a:fillRef idx="0">
+            <a:scrgbClr r="0" g="0" b="0"/>
+          </a:fillRef>
+          <a:effectRef idx="0">
+            <a:scrgbClr r="0" g="0" b="0"/>
+          </a:effectRef>
+          <a:fontRef idx="minor">
+            <a:schemeClr val="lt1"/>
+          </a:fontRef>
+        </p:style>
+        <p:txBody>
+          <a:bodyPr rtlCol="0" anchor="ctr"/>
+          <a:lstStyle/>
+          <a:p>
+            <a:r>
+              <a:rPr lang="en-US" dirty="0"/>
+              <a:t>Class average is 88</a:t>
+            </a:r>
+          </a:p>
+          <a:p>
+            <a:endParaRPr lang="en-US" dirty="0"/>
+          </a:p>
+          <a:p>
+            <a:endParaRPr lang="en-US" dirty="0"/>
+          </a:p>
+          <a:p>
+            <a:endParaRPr lang="en-US" dirty="0"/>
+          </a:p>
+          <a:p>
+            <a:endParaRPr lang="en-US" dirty="0"/>
+          </a:p>
+        </p:txBody>
+      </p:sp>
+      <p:sp>
+        <p:nvSpPr>
+          <p:cNvPr id="13" name="TextBox 12">
+            <a:extLst>
+              <a:ext uri="{FF2B5EF4-FFF2-40B4-BE49-F238E27FC236}">
+                <a16:creationId xmlns:a16="http://schemas.microsoft.com/office/drawing/2014/main" id="{8251A016-F24E-842B-0A36-DA1568892E11}"/>
+              </a:ext>
+            </a:extLst>
+          </p:cNvPr>
+          <p:cNvSpPr txBox="1"/>
+          <p:nvPr/>
+        </p:nvSpPr>
+        <p:spPr>
+          <a:xfrm>
+            <a:off x="1217140" y="2766065"/>
+            <a:ext cx="1573943" cy="276999"/>
+          </a:xfrm>
+          <a:prstGeom prst="rect">
+            <a:avLst/>
+          </a:prstGeom>
+          <a:noFill/>
+        </p:spPr>
+        <p:txBody>
+          <a:bodyPr wrap="square">
+            <a:spAutoFit/>
+          </a:bodyPr>
+          <a:lstStyle/>
+          <a:p>
+            <a:r>
+              <a:rPr lang="en-US" sz="1200" dirty="0">
+                <a:solidFill>
+                  <a:schemeClr val="accent3"/>
+                </a:solidFill>
+                <a:latin typeface="Fira Code"/>
+                <a:ea typeface="Fira Code"/>
+                <a:cs typeface="B Nazanin" panose="00000400000000000000" pitchFamily="2" charset="-78"/>
+              </a:rPr>
+              <a:t>Example Input:</a:t>
+            </a:r>
+          </a:p>
+        </p:txBody>
+      </p:sp>
+      <p:sp>
+        <p:nvSpPr>
+          <p:cNvPr id="14" name="TextBox 13">
+            <a:extLst>
+              <a:ext uri="{FF2B5EF4-FFF2-40B4-BE49-F238E27FC236}">
+                <a16:creationId xmlns:a16="http://schemas.microsoft.com/office/drawing/2014/main" id="{0C1A20E6-6F7F-57E4-A7A3-C7B26ACE6D87}"/>
+              </a:ext>
+            </a:extLst>
+          </p:cNvPr>
+          <p:cNvSpPr txBox="1"/>
+          <p:nvPr/>
+        </p:nvSpPr>
+        <p:spPr>
+          <a:xfrm>
+            <a:off x="5383942" y="2766064"/>
+            <a:ext cx="1573943" cy="276999"/>
+          </a:xfrm>
+          <a:prstGeom prst="rect">
+            <a:avLst/>
+          </a:prstGeom>
+          <a:noFill/>
+        </p:spPr>
+        <p:txBody>
+          <a:bodyPr wrap="square">
+            <a:spAutoFit/>
+          </a:bodyPr>
+          <a:lstStyle/>
+          <a:p>
+            <a:r>
+              <a:rPr lang="en-US" sz="1200" dirty="0">
+                <a:solidFill>
+                  <a:schemeClr val="accent3"/>
+                </a:solidFill>
+                <a:latin typeface="Fira Code"/>
+                <a:ea typeface="Fira Code"/>
+                <a:cs typeface="B Nazanin" panose="00000400000000000000" pitchFamily="2" charset="-78"/>
+              </a:rPr>
+              <a:t>Output:</a:t>
+            </a:r>
+          </a:p>
+        </p:txBody>
+      </p:sp>
+    </p:spTree>
+    <p:extLst>
+      <p:ext uri="{BB962C8B-B14F-4D97-AF65-F5344CB8AC3E}">
+        <p14:creationId xmlns:p14="http://schemas.microsoft.com/office/powerpoint/2010/main" val="2383727754"/>
       </p:ext>
     </p:extLst>
   </p:cSld>

--- a/slides/2.Pseudocode/Pseudocode.pptx
+++ b/slides/2.Pseudocode/Pseudocode.pptx
@@ -6441,12 +6441,12 @@
               <a:buNone/>
             </a:pPr>
             <a:r>
-              <a:rPr lang="en" sz="1100" dirty="0">
+              <a:rPr lang="fa-IR" sz="1100" dirty="0">
                 <a:solidFill>
                   <a:schemeClr val="accent3"/>
                 </a:solidFill>
               </a:rPr>
-              <a:t>8</a:t>
+              <a:t>9</a:t>
             </a:r>
             <a:endParaRPr lang="en" dirty="0">
               <a:solidFill>
@@ -7183,7 +7183,7 @@
         <p:spPr>
           <a:xfrm>
             <a:off x="8433851" y="4694675"/>
-            <a:ext cx="319124" cy="357300"/>
+            <a:ext cx="364160" cy="357300"/>
           </a:xfrm>
           <a:prstGeom prst="rect">
             <a:avLst/>
@@ -7450,12 +7450,12 @@
               <a:buNone/>
             </a:pPr>
             <a:r>
-              <a:rPr lang="en" sz="1100" dirty="0">
+              <a:rPr lang="fa-IR" sz="1100" dirty="0">
                 <a:solidFill>
                   <a:schemeClr val="accent3"/>
                 </a:solidFill>
               </a:rPr>
-              <a:t>8</a:t>
+              <a:t>10</a:t>
             </a:r>
             <a:endParaRPr lang="en" dirty="0">
               <a:solidFill>
@@ -8071,8 +8071,8 @@
         </p:nvSpPr>
         <p:spPr>
           <a:xfrm>
-            <a:off x="8433851" y="4694675"/>
-            <a:ext cx="319124" cy="357300"/>
+            <a:off x="8433850" y="4694675"/>
+            <a:ext cx="382695" cy="357300"/>
           </a:xfrm>
           <a:prstGeom prst="rect">
             <a:avLst/>
@@ -8339,12 +8339,12 @@
               <a:buNone/>
             </a:pPr>
             <a:r>
-              <a:rPr lang="en" sz="1100" dirty="0">
+              <a:rPr lang="fa-IR" sz="1100" dirty="0">
                 <a:solidFill>
                   <a:schemeClr val="accent3"/>
                 </a:solidFill>
               </a:rPr>
-              <a:t>8</a:t>
+              <a:t>11</a:t>
             </a:r>
             <a:endParaRPr lang="en" dirty="0">
               <a:solidFill>

--- a/slides/2.Pseudocode/Pseudocode.pptx
+++ b/slides/2.Pseudocode/Pseudocode.pptx
@@ -5858,7 +5858,7 @@
                 <a:cs typeface="Fira Code"/>
                 <a:sym typeface="Fira Code"/>
               </a:rPr>
-              <a:t>Home Work</a:t>
+              <a:t>Homework</a:t>
             </a:r>
           </a:p>
         </p:txBody>
@@ -6867,7 +6867,7 @@
                 <a:cs typeface="Fira Code"/>
                 <a:sym typeface="Fira Code"/>
               </a:rPr>
-              <a:t>Home Work</a:t>
+              <a:t>Homework</a:t>
             </a:r>
           </a:p>
         </p:txBody>
@@ -7756,7 +7756,7 @@
                 <a:cs typeface="Fira Code"/>
                 <a:sym typeface="Fira Code"/>
               </a:rPr>
-              <a:t>Home Work</a:t>
+              <a:t>Homework</a:t>
             </a:r>
           </a:p>
         </p:txBody>

--- a/slides/2.Pseudocode/Pseudocode.pptx
+++ b/slides/2.Pseudocode/Pseudocode.pptx
@@ -5858,7 +5858,7 @@
                 <a:cs typeface="Fira Code"/>
                 <a:sym typeface="Fira Code"/>
               </a:rPr>
-              <a:t>Home Work</a:t>
+              <a:t>Homework</a:t>
             </a:r>
           </a:p>
         </p:txBody>
@@ -6858,7 +6858,7 @@
           <a:lstStyle/>
           <a:p>
             <a:r>
-              <a:rPr lang="en-US" sz="2400" dirty="0">
+              <a:rPr lang="en-US" sz="2400">
                 <a:solidFill>
                   <a:schemeClr val="accent2"/>
                 </a:solidFill>
@@ -6867,8 +6867,17 @@
                 <a:cs typeface="Fira Code"/>
                 <a:sym typeface="Fira Code"/>
               </a:rPr>
-              <a:t>Home Work</a:t>
+              <a:t>Homework</a:t>
             </a:r>
+            <a:endParaRPr lang="en-US" sz="2400" dirty="0">
+              <a:solidFill>
+                <a:schemeClr val="accent2"/>
+              </a:solidFill>
+              <a:latin typeface="Fira Code"/>
+              <a:ea typeface="Fira Code"/>
+              <a:cs typeface="Fira Code"/>
+              <a:sym typeface="Fira Code"/>
+            </a:endParaRPr>
           </a:p>
         </p:txBody>
       </p:sp>
@@ -7479,7 +7488,7 @@
         </p:nvSpPr>
         <p:spPr>
           <a:xfrm>
-            <a:off x="1062681" y="777501"/>
+            <a:off x="1069881" y="755901"/>
             <a:ext cx="7858898" cy="2492990"/>
           </a:xfrm>
           <a:prstGeom prst="rect">
@@ -8598,34 +8607,33 @@
           <a:lstStyle/>
           <a:p>
             <a:r>
-              <a:rPr lang="en-US"/>
+              <a:rPr lang="en-US" dirty="0"/>
               <a:t>Enter grade: 95  </a:t>
             </a:r>
           </a:p>
           <a:p>
             <a:r>
-              <a:rPr lang="en-US"/>
+              <a:rPr lang="en-US" dirty="0"/>
               <a:t>Enter grade: 83  </a:t>
             </a:r>
           </a:p>
           <a:p>
             <a:r>
-              <a:rPr lang="en-US"/>
+              <a:rPr lang="en-US" dirty="0"/>
               <a:t>Enter grade: 74  </a:t>
             </a:r>
           </a:p>
           <a:p>
             <a:r>
-              <a:rPr lang="en-US"/>
+              <a:rPr lang="en-US" dirty="0"/>
               <a:t>Enter grade: 100  </a:t>
             </a:r>
           </a:p>
           <a:p>
             <a:r>
-              <a:rPr lang="en-US"/>
+              <a:rPr lang="en-US" dirty="0"/>
               <a:t>Enter grade: -1</a:t>
             </a:r>
-            <a:endParaRPr lang="en-US" dirty="0"/>
           </a:p>
         </p:txBody>
       </p:sp>
@@ -12268,7 +12276,7 @@
             <a:pPr algn="just"/>
             <a:endParaRPr lang="fa-IR" sz="1600" dirty="0">
               <a:solidFill>
-                <a:schemeClr val="accent3"/>
+                <a:schemeClr val="accent2"/>
               </a:solidFill>
               <a:latin typeface="Fira Code"/>
               <a:ea typeface="Fira Code"/>
@@ -12280,7 +12288,7 @@
             <a:r>
               <a:rPr lang="en-US" sz="1600" b="1" dirty="0">
                 <a:solidFill>
-                  <a:srgbClr val="FF0000"/>
+                  <a:schemeClr val="accent2"/>
                 </a:solidFill>
                 <a:latin typeface="Fira Code"/>
                 <a:ea typeface="Fira Code"/>
@@ -12291,7 +12299,7 @@
             <a:r>
               <a:rPr lang="en-US" sz="1600" dirty="0">
                 <a:solidFill>
-                  <a:srgbClr val="FF0000"/>
+                  <a:schemeClr val="accent2"/>
                 </a:solidFill>
                 <a:latin typeface="Fira Code"/>
                 <a:ea typeface="Fira Code"/>
@@ -12304,7 +12312,7 @@
             <a:pPr algn="just"/>
             <a:endParaRPr lang="fa-IR" sz="1600" dirty="0">
               <a:solidFill>
-                <a:srgbClr val="FF0000"/>
+                <a:schemeClr val="accent2"/>
               </a:solidFill>
               <a:latin typeface="Fira Code"/>
               <a:ea typeface="Fira Code"/>
@@ -12316,7 +12324,7 @@
             <a:r>
               <a:rPr lang="en-US" sz="1200" dirty="0">
                 <a:solidFill>
-                  <a:srgbClr val="FF0000"/>
+                  <a:schemeClr val="accent2"/>
                 </a:solidFill>
                 <a:latin typeface="Fira Code"/>
                 <a:ea typeface="Fira Code"/>
@@ -12326,7 +12334,7 @@
             </a:r>
             <a:endParaRPr lang="fa-IR" sz="1200" dirty="0">
               <a:solidFill>
-                <a:srgbClr val="FF0000"/>
+                <a:schemeClr val="accent2"/>
               </a:solidFill>
               <a:latin typeface="Fira Code"/>
               <a:ea typeface="Fira Code"/>
@@ -12338,7 +12346,7 @@
             <a:r>
               <a:rPr lang="en-US" sz="1200" dirty="0">
                 <a:solidFill>
-                  <a:srgbClr val="FF0000"/>
+                  <a:schemeClr val="accent2"/>
                 </a:solidFill>
                 <a:latin typeface="Fira Code"/>
                 <a:ea typeface="Fira Code"/>
@@ -12351,7 +12359,7 @@
             <a:pPr algn="just"/>
             <a:endParaRPr lang="en-US" sz="1200" dirty="0">
               <a:solidFill>
-                <a:srgbClr val="FF0000"/>
+                <a:schemeClr val="accent2"/>
               </a:solidFill>
               <a:latin typeface="Fira Code"/>
               <a:ea typeface="Fira Code"/>
@@ -12363,7 +12371,7 @@
             <a:r>
               <a:rPr lang="en-US" sz="1600" b="1" dirty="0">
                 <a:solidFill>
-                  <a:srgbClr val="FF0000"/>
+                  <a:schemeClr val="accent2"/>
                 </a:solidFill>
                 <a:latin typeface="Fira Code"/>
                 <a:ea typeface="Fira Code"/>
@@ -12376,7 +12384,7 @@
             <a:pPr algn="just"/>
             <a:endParaRPr lang="en-US" sz="1200" dirty="0">
               <a:solidFill>
-                <a:srgbClr val="FF0000"/>
+                <a:schemeClr val="accent2"/>
               </a:solidFill>
               <a:latin typeface="Fira Code"/>
               <a:ea typeface="Fira Code"/>
@@ -12388,7 +12396,7 @@
             <a:r>
               <a:rPr lang="en-US" sz="1200" dirty="0">
                 <a:solidFill>
-                  <a:srgbClr val="FF0000"/>
+                  <a:schemeClr val="accent2"/>
                 </a:solidFill>
                 <a:latin typeface="Fira Code"/>
                 <a:ea typeface="Fira Code"/>
@@ -12402,7 +12410,7 @@
             <a:r>
               <a:rPr lang="en-US" sz="1200" dirty="0">
                 <a:solidFill>
-                  <a:srgbClr val="FF0000"/>
+                  <a:schemeClr val="accent2"/>
                 </a:solidFill>
                 <a:latin typeface="Fira Code"/>
                 <a:ea typeface="Fira Code"/>
